--- a/courses/learn_floorplanning/module03-05-macro-placement/slides.pptx
+++ b/courses/learn_floorplanning/module03-05-macro-placement/slides.pptx
@@ -11,6 +11,10 @@
     <p:sldId id="259" r:id="rId11"/>
     <p:sldId id="260" r:id="rId12"/>
     <p:sldId id="261" r:id="rId13"/>
+    <p:sldId id="262" r:id="rId14"/>
+    <p:sldId id="263" r:id="rId15"/>
+    <p:sldId id="264" r:id="rId16"/>
+    <p:sldId id="265" r:id="rId17"/>
   </p:sldIdLst>
   <p:sldSz cx="12191695" cy="6858000" type="screen4x3"/>
   <p:notesSz cx="6858000" cy="9144000"/>
@@ -507,7 +511,83 @@
           <a:lstStyle/>
           <a:p>
             <a:r>
-              <a:t>Hard macros are fixed-size blocks—memories, analog IP, pre-placed covers. Sometimes their (x, y) is fixed too. Floorplanning must pack softer or movable modules around them without overlap and without leaving the outline. Treating macros as ordinary free rectangles loses the constraint.</a:t>
+              <a:t>Macros are hard fixed rectangles. In macro mode, D is pinned at zero comma zero with macro true, size three by one. A stacks above; B, C, and E pack to the right—still legal.</a:t>
+            </a:r>
+          </a:p>
+          <a:p/>
+          <a:p>
+            <a:r>
+              <a:t>&lt;!-- algorithm-walkthrough --&gt;</a:t>
+            </a:r>
+          </a:p>
+        </p:txBody>
+      </p:sp>
+      <p:sp>
+        <p:nvSpPr>
+          <p:cNvPr id="4" name="Slide Number Placeholder 3"/>
+          <p:cNvSpPr>
+            <a:spLocks noGrp="1"/>
+          </p:cNvSpPr>
+          <p:nvPr>
+            <p:ph type="sldNum" idx="5" sz="quarter"/>
+          </p:nvPr>
+        </p:nvSpPr>
+        <p:spPr/>
+      </p:sp>
+    </p:spTree>
+  </p:cSld>
+  <p:clrMapOvr>
+    <a:masterClrMapping/>
+  </p:clrMapOvr>
+</p:notes>
+</file>
+
+<file path=ppt/notesSlides/notesSlide10.xml><?xml version="1.0" encoding="utf-8"?>
+<p:notes xmlns:a="http://schemas.openxmlformats.org/drawingml/2006/main" xmlns:p="http://schemas.openxmlformats.org/presentationml/2006/main" xmlns:r="http://schemas.openxmlformats.org/officeDocument/2006/relationships">
+  <p:cSld>
+    <p:spTree>
+      <p:nvGrpSpPr>
+        <p:cNvPr id="1" name=""/>
+        <p:cNvGrpSpPr/>
+        <p:nvPr/>
+      </p:nvGrpSpPr>
+      <p:grpSpPr>
+        <a:xfrm>
+          <a:off x="0" y="0"/>
+          <a:ext cx="0" cy="0"/>
+          <a:chOff x="0" y="0"/>
+          <a:chExt cx="0" cy="0"/>
+        </a:xfrm>
+      </p:grpSpPr>
+      <p:sp>
+        <p:nvSpPr>
+          <p:cNvPr id="2" name="Slide Image Placeholder 1"/>
+          <p:cNvSpPr>
+            <a:spLocks noGrp="1"/>
+          </p:cNvSpPr>
+          <p:nvPr>
+            <p:ph type="sldImg" idx="2"/>
+          </p:nvPr>
+        </p:nvSpPr>
+        <p:spPr/>
+      </p:sp>
+      <p:sp>
+        <p:nvSpPr>
+          <p:cNvPr id="3" name="Notes Placeholder 2"/>
+          <p:cNvSpPr>
+            <a:spLocks noGrp="1"/>
+          </p:cNvSpPr>
+          <p:nvPr>
+            <p:ph type="body" idx="3" sz="quarter"/>
+          </p:nvPr>
+        </p:nvSpPr>
+        <p:spPr/>
+        <p:txBody>
+          <a:bodyPr/>
+          <a:lstStyle/>
+          <a:p>
+            <a:r>
+              <a:t>Ship the legal macro packing. Next: hierarchical AB left and CDE right at offset five.</a:t>
             </a:r>
           </a:p>
         </p:txBody>
@@ -577,7 +657,7 @@
           <a:lstStyle/>
           <a:p>
             <a:r>
-              <a:t>Mark macros as hard: width and height immutable. If position is fixed, lock (x, y) and forbid moves that shift them. Other modules pack in the remaining free space. Cost still includes overflow and deadspace; wirelength may prefer soft blocks near related macros. Legality checks apply unchanged—macros are just immovable obstacles.</a:t>
+              <a:t>In the free golden packing, D sits at zero comma two above A. Nothing is flagged as a hard macro yet.</a:t>
             </a:r>
           </a:p>
         </p:txBody>
@@ -647,7 +727,7 @@
           <a:lstStyle/>
           <a:p>
             <a:r>
-              <a:t>Open **macro-placement**. Lock one module as a fixed hard block. Try to pack the others around it. Force an overlap and watch the checker. Unlock and compare freedom. Then encode fixed blocks in your Track A data model.</a:t>
+              <a:t>Macro mode pins hard block D at the origin and marks it macro true. Soft and standard cells must pack around that fixed rectangle.</a:t>
             </a:r>
           </a:p>
         </p:txBody>
@@ -717,7 +797,7 @@
           <a:lstStyle/>
           <a:p>
             <a:r>
-              <a:t>Extend `tiny_modules.json` with a `fixed: true` and optional `x`, `y` on one module. Pack the rest with your chosen representation, treating the macro as an obstacle. Fail loudly if a move would shift a fixed macro. Report legality and deadspace.</a:t>
+              <a:t>A stacks above D; B, C, and E fill to the right. The macro packing differs from the free golden—D no longer sits at zero comma two.</a:t>
             </a:r>
           </a:p>
         </p:txBody>
@@ -787,7 +867,7 @@
           <a:lstStyle/>
           <a:p>
             <a:r>
-              <a:t>Silently moving a “fixed” macro during SA is a trust-breaking bug. Also don’t shrink hard macros when soft sizing runs. Overlapping two macros at init means the instance is already illegal—detect that before search.</a:t>
+              <a:t>Despite the fixed block, the packing stays legal: no overflow, no overlaps. Fixed macros constrain search but do not excuse illegality.</a:t>
             </a:r>
           </a:p>
         </p:txBody>
@@ -857,7 +937,223 @@
           <a:lstStyle/>
           <a:p>
             <a:r>
-              <a:t>Produce a legal packing with at least one fixed hard macro. Next: hierarchical floorplans that nest sub-packings inside parent regions.</a:t>
+              <a:t>Industrial flows often place large macros before standard cells. Treat fixed rectangles as hard constraints, then optimize the rest.</a:t>
+            </a:r>
+          </a:p>
+          <a:p/>
+          <a:p>
+            <a:r>
+              <a:t>&lt;!-- /algorithm-walkthrough --&gt;</a:t>
+            </a:r>
+          </a:p>
+        </p:txBody>
+      </p:sp>
+      <p:sp>
+        <p:nvSpPr>
+          <p:cNvPr id="4" name="Slide Number Placeholder 3"/>
+          <p:cNvSpPr>
+            <a:spLocks noGrp="1"/>
+          </p:cNvSpPr>
+          <p:nvPr>
+            <p:ph type="sldNum" idx="5" sz="quarter"/>
+          </p:nvPr>
+        </p:nvSpPr>
+        <p:spPr/>
+      </p:sp>
+    </p:spTree>
+  </p:cSld>
+  <p:clrMapOvr>
+    <a:masterClrMapping/>
+  </p:clrMapOvr>
+</p:notes>
+</file>
+
+<file path=ppt/notesSlides/notesSlide7.xml><?xml version="1.0" encoding="utf-8"?>
+<p:notes xmlns:a="http://schemas.openxmlformats.org/drawingml/2006/main" xmlns:p="http://schemas.openxmlformats.org/presentationml/2006/main" xmlns:r="http://schemas.openxmlformats.org/officeDocument/2006/relationships">
+  <p:cSld>
+    <p:spTree>
+      <p:nvGrpSpPr>
+        <p:cNvPr id="1" name=""/>
+        <p:cNvGrpSpPr/>
+        <p:nvPr/>
+      </p:nvGrpSpPr>
+      <p:grpSpPr>
+        <a:xfrm>
+          <a:off x="0" y="0"/>
+          <a:ext cx="0" cy="0"/>
+          <a:chOff x="0" y="0"/>
+          <a:chExt cx="0" cy="0"/>
+        </a:xfrm>
+      </p:grpSpPr>
+      <p:sp>
+        <p:nvSpPr>
+          <p:cNvPr id="2" name="Slide Image Placeholder 1"/>
+          <p:cNvSpPr>
+            <a:spLocks noGrp="1"/>
+          </p:cNvSpPr>
+          <p:nvPr>
+            <p:ph type="sldImg" idx="2"/>
+          </p:nvPr>
+        </p:nvSpPr>
+        <p:spPr/>
+      </p:sp>
+      <p:sp>
+        <p:nvSpPr>
+          <p:cNvPr id="3" name="Notes Placeholder 2"/>
+          <p:cNvSpPr>
+            <a:spLocks noGrp="1"/>
+          </p:cNvSpPr>
+          <p:nvPr>
+            <p:ph type="body" idx="3" sz="quarter"/>
+          </p:nvPr>
+        </p:nvSpPr>
+        <p:spPr/>
+        <p:txBody>
+          <a:bodyPr/>
+          <a:lstStyle/>
+          <a:p>
+            <a:r>
+              <a:t>Open macro-placement. Compare free golden D at zero comma two with Place macros: D at zero comma zero. Confirm legality and the macro flag.</a:t>
+            </a:r>
+          </a:p>
+        </p:txBody>
+      </p:sp>
+      <p:sp>
+        <p:nvSpPr>
+          <p:cNvPr id="4" name="Slide Number Placeholder 3"/>
+          <p:cNvSpPr>
+            <a:spLocks noGrp="1"/>
+          </p:cNvSpPr>
+          <p:nvPr>
+            <p:ph type="sldNum" idx="5" sz="quarter"/>
+          </p:nvPr>
+        </p:nvSpPr>
+        <p:spPr/>
+      </p:sp>
+    </p:spTree>
+  </p:cSld>
+  <p:clrMapOvr>
+    <a:masterClrMapping/>
+  </p:clrMapOvr>
+</p:notes>
+</file>
+
+<file path=ppt/notesSlides/notesSlide8.xml><?xml version="1.0" encoding="utf-8"?>
+<p:notes xmlns:a="http://schemas.openxmlformats.org/drawingml/2006/main" xmlns:p="http://schemas.openxmlformats.org/presentationml/2006/main" xmlns:r="http://schemas.openxmlformats.org/officeDocument/2006/relationships">
+  <p:cSld>
+    <p:spTree>
+      <p:nvGrpSpPr>
+        <p:cNvPr id="1" name=""/>
+        <p:cNvGrpSpPr/>
+        <p:nvPr/>
+      </p:nvGrpSpPr>
+      <p:grpSpPr>
+        <a:xfrm>
+          <a:off x="0" y="0"/>
+          <a:ext cx="0" cy="0"/>
+          <a:chOff x="0" y="0"/>
+          <a:chExt cx="0" cy="0"/>
+        </a:xfrm>
+      </p:grpSpPr>
+      <p:sp>
+        <p:nvSpPr>
+          <p:cNvPr id="2" name="Slide Image Placeholder 1"/>
+          <p:cNvSpPr>
+            <a:spLocks noGrp="1"/>
+          </p:cNvSpPr>
+          <p:nvPr>
+            <p:ph type="sldImg" idx="2"/>
+          </p:nvPr>
+        </p:nvSpPr>
+        <p:spPr/>
+      </p:sp>
+      <p:sp>
+        <p:nvSpPr>
+          <p:cNvPr id="3" name="Notes Placeholder 2"/>
+          <p:cNvSpPr>
+            <a:spLocks noGrp="1"/>
+          </p:cNvSpPr>
+          <p:nvPr>
+            <p:ph type="body" idx="3" sz="quarter"/>
+          </p:nvPr>
+        </p:nvSpPr>
+        <p:spPr/>
+        <p:txBody>
+          <a:bodyPr/>
+          <a:lstStyle/>
+          <a:p>
+            <a:r>
+              <a:t>Fix D, pack the rest, assert D at (0,0), D.macro true, and is_legal_packing true. Note the free golden differs.</a:t>
+            </a:r>
+          </a:p>
+        </p:txBody>
+      </p:sp>
+      <p:sp>
+        <p:nvSpPr>
+          <p:cNvPr id="4" name="Slide Number Placeholder 3"/>
+          <p:cNvSpPr>
+            <a:spLocks noGrp="1"/>
+          </p:cNvSpPr>
+          <p:nvPr>
+            <p:ph type="sldNum" idx="5" sz="quarter"/>
+          </p:nvPr>
+        </p:nvSpPr>
+        <p:spPr/>
+      </p:sp>
+    </p:spTree>
+  </p:cSld>
+  <p:clrMapOvr>
+    <a:masterClrMapping/>
+  </p:clrMapOvr>
+</p:notes>
+</file>
+
+<file path=ppt/notesSlides/notesSlide9.xml><?xml version="1.0" encoding="utf-8"?>
+<p:notes xmlns:a="http://schemas.openxmlformats.org/drawingml/2006/main" xmlns:p="http://schemas.openxmlformats.org/presentationml/2006/main" xmlns:r="http://schemas.openxmlformats.org/officeDocument/2006/relationships">
+  <p:cSld>
+    <p:spTree>
+      <p:nvGrpSpPr>
+        <p:cNvPr id="1" name=""/>
+        <p:cNvGrpSpPr/>
+        <p:nvPr/>
+      </p:nvGrpSpPr>
+      <p:grpSpPr>
+        <a:xfrm>
+          <a:off x="0" y="0"/>
+          <a:ext cx="0" cy="0"/>
+          <a:chOff x="0" y="0"/>
+          <a:chExt cx="0" cy="0"/>
+        </a:xfrm>
+      </p:grpSpPr>
+      <p:sp>
+        <p:nvSpPr>
+          <p:cNvPr id="2" name="Slide Image Placeholder 1"/>
+          <p:cNvSpPr>
+            <a:spLocks noGrp="1"/>
+          </p:cNvSpPr>
+          <p:nvPr>
+            <p:ph type="sldImg" idx="2"/>
+          </p:nvPr>
+        </p:nvSpPr>
+        <p:spPr/>
+      </p:sp>
+      <p:sp>
+        <p:nvSpPr>
+          <p:cNvPr id="3" name="Notes Placeholder 2"/>
+          <p:cNvSpPr>
+            <a:spLocks noGrp="1"/>
+          </p:cNvSpPr>
+          <p:nvPr>
+            <p:ph type="body" idx="3" sz="quarter"/>
+          </p:nvPr>
+        </p:nvSpPr>
+        <p:spPr/>
+        <p:txBody>
+          <a:bodyPr/>
+          <a:lstStyle/>
+          <a:p>
+            <a:r>
+              <a:t>Moving macros after fixing them; shrinking macro size; allowing overlaps against the fixed block.</a:t>
             </a:r>
           </a:p>
         </p:txBody>
@@ -3900,7 +4196,7 @@
                 </a:solidFill>
                 <a:latin typeface="Calibri"/>
               </a:rPr>
-              <a:t>Hard macros</a:t>
+              <a:t>Hard macro / fixed-block placement</a:t>
             </a:r>
           </a:p>
           <a:p>
@@ -3919,7 +4215,7 @@
                 </a:solidFill>
                 <a:latin typeface="Calibri"/>
               </a:rPr>
-              <a:t>Hard macros are fixed-size blocks, memories, analog IP, pre-placed covers</a:t>
+              <a:t>Macros are hard fixed rectangles</a:t>
             </a:r>
           </a:p>
         </p:txBody>
@@ -3927,6 +4223,169 @@
       <p:sp>
         <p:nvSpPr>
           <p:cNvPr id="3" name="TextBox 2"/>
+          <p:cNvSpPr txBox="1"/>
+          <p:nvPr/>
+        </p:nvSpPr>
+        <p:spPr>
+          <a:xfrm>
+            <a:off x="548640" y="6355080"/>
+            <a:ext cx="11064240" cy="320040"/>
+          </a:xfrm>
+          <a:prstGeom prst="rect">
+            <a:avLst/>
+          </a:prstGeom>
+          <a:noFill/>
+        </p:spPr>
+        <p:txBody>
+          <a:bodyPr wrap="square">
+            <a:noAutofit/>
+          </a:bodyPr>
+          <a:lstStyle/>
+          <a:p>
+            <a:pPr algn="r">
+              <a:lnSpc>
+                <a:spcPts val="2200"/>
+              </a:lnSpc>
+              <a:defRPr sz="1000" b="0">
+                <a:solidFill>
+                  <a:srgbClr val="666666"/>
+                </a:solidFill>
+                <a:latin typeface="Calibri"/>
+              </a:defRPr>
+            </a:pPr>
+            <a:r>
+              <a:t>learn_floorplanning — 05 macro placement</a:t>
+            </a:r>
+          </a:p>
+        </p:txBody>
+      </p:sp>
+    </p:spTree>
+  </p:cSld>
+  <p:clrMapOvr>
+    <a:masterClrMapping/>
+  </p:clrMapOvr>
+</p:sld>
+</file>
+
+<file path=ppt/slides/slide10.xml><?xml version="1.0" encoding="utf-8"?>
+<p:sld xmlns:a="http://schemas.openxmlformats.org/drawingml/2006/main" xmlns:p="http://schemas.openxmlformats.org/presentationml/2006/main" xmlns:r="http://schemas.openxmlformats.org/officeDocument/2006/relationships">
+  <p:cSld>
+    <p:spTree>
+      <p:nvGrpSpPr>
+        <p:cNvPr id="1" name=""/>
+        <p:cNvGrpSpPr/>
+        <p:nvPr/>
+      </p:nvGrpSpPr>
+      <p:grpSpPr/>
+      <p:sp>
+        <p:nvSpPr>
+          <p:cNvPr id="2" name="TextBox 1"/>
+          <p:cNvSpPr txBox="1"/>
+          <p:nvPr/>
+        </p:nvSpPr>
+        <p:spPr>
+          <a:xfrm>
+            <a:off x="548640" y="411480"/>
+            <a:ext cx="11064240" cy="777240"/>
+          </a:xfrm>
+          <a:prstGeom prst="rect">
+            <a:avLst/>
+          </a:prstGeom>
+          <a:noFill/>
+        </p:spPr>
+        <p:txBody>
+          <a:bodyPr wrap="square">
+            <a:noAutofit/>
+          </a:bodyPr>
+          <a:lstStyle/>
+          <a:p>
+            <a:pPr>
+              <a:lnSpc>
+                <a:spcPts val="2200"/>
+              </a:lnSpc>
+            </a:pPr>
+            <a:r>
+              <a:rPr sz="2800" b="1">
+                <a:solidFill>
+                  <a:srgbClr val="1A1A2E"/>
+                </a:solidFill>
+                <a:latin typeface="Calibri"/>
+              </a:rPr>
+              <a:t>Your turn</a:t>
+            </a:r>
+          </a:p>
+        </p:txBody>
+      </p:sp>
+      <p:sp>
+        <p:nvSpPr>
+          <p:cNvPr id="3" name="TextBox 2"/>
+          <p:cNvSpPr txBox="1"/>
+          <p:nvPr/>
+        </p:nvSpPr>
+        <p:spPr>
+          <a:xfrm>
+            <a:off x="548640" y="1234440"/>
+            <a:ext cx="11064240" cy="4937760"/>
+          </a:xfrm>
+          <a:prstGeom prst="rect">
+            <a:avLst/>
+          </a:prstGeom>
+          <a:noFill/>
+        </p:spPr>
+        <p:txBody>
+          <a:bodyPr wrap="square">
+            <a:noAutofit/>
+          </a:bodyPr>
+          <a:lstStyle/>
+          <a:p>
+            <a:pPr lvl="0" marL="457200" indent="-228600">
+              <a:buFont typeface="Calibri"/>
+              <a:spcAft>
+                <a:spcPts val="1000"/>
+              </a:spcAft>
+              <a:buSzPct val="100000"/>
+              <a:buChar char="•"/>
+              <a:lnSpc>
+                <a:spcPts val="2200"/>
+              </a:lnSpc>
+            </a:pPr>
+            <a:r>
+              <a:rPr sz="2000" b="0">
+                <a:solidFill>
+                  <a:srgbClr val="333333"/>
+                </a:solidFill>
+                <a:latin typeface="Calibri"/>
+              </a:rPr>
+              <a:t>Ship the legal macro packing</a:t>
+            </a:r>
+          </a:p>
+          <a:p>
+            <a:pPr lvl="0" marL="457200" indent="-228600">
+              <a:buFont typeface="Calibri"/>
+              <a:spcAft>
+                <a:spcPts val="1000"/>
+              </a:spcAft>
+              <a:buSzPct val="100000"/>
+              <a:buChar char="•"/>
+              <a:lnSpc>
+                <a:spcPts val="2200"/>
+              </a:lnSpc>
+            </a:pPr>
+            <a:r>
+              <a:rPr sz="2000" b="0">
+                <a:solidFill>
+                  <a:srgbClr val="333333"/>
+                </a:solidFill>
+                <a:latin typeface="Calibri"/>
+              </a:rPr>
+              <a:t>Next: hierarchical AB left and CDE right at offset five</a:t>
+            </a:r>
+          </a:p>
+        </p:txBody>
+      </p:sp>
+      <p:sp>
+        <p:nvSpPr>
+          <p:cNvPr id="4" name="TextBox 3"/>
           <p:cNvSpPr txBox="1"/>
           <p:nvPr/>
         </p:nvSpPr>
@@ -4015,21 +4474,45 @@
                 </a:solidFill>
                 <a:latin typeface="Calibri"/>
               </a:rPr>
-              <a:t>The idea</a:t>
-            </a:r>
-          </a:p>
-        </p:txBody>
-      </p:sp>
-      <p:sp>
-        <p:nvSpPr>
-          <p:cNvPr id="3" name="TextBox 2"/>
+              <a:t>Free golden has movable D</a:t>
+            </a:r>
+          </a:p>
+        </p:txBody>
+      </p:sp>
+      <p:pic>
+        <p:nvPicPr>
+          <p:cNvPr id="3" name="Picture 2" descr="01-free.png"/>
+          <p:cNvPicPr>
+            <a:picLocks noChangeAspect="1"/>
+          </p:cNvPicPr>
+          <p:nvPr/>
+        </p:nvPicPr>
+        <p:blipFill>
+          <a:blip r:embed="rId2"/>
+          <a:stretch>
+            <a:fillRect/>
+          </a:stretch>
+        </p:blipFill>
+        <p:spPr>
+          <a:xfrm>
+            <a:off x="548640" y="1143000"/>
+            <a:ext cx="9424736" cy="4572000"/>
+          </a:xfrm>
+          <a:prstGeom prst="rect">
+            <a:avLst/>
+          </a:prstGeom>
+        </p:spPr>
+      </p:pic>
+      <p:sp>
+        <p:nvSpPr>
+          <p:cNvPr id="4" name="TextBox 3"/>
           <p:cNvSpPr txBox="1"/>
           <p:nvPr/>
         </p:nvSpPr>
         <p:spPr>
           <a:xfrm>
-            <a:off x="548640" y="1234440"/>
-            <a:ext cx="11064240" cy="4937760"/>
+            <a:off x="548640" y="5897880"/>
+            <a:ext cx="11064240" cy="411480"/>
           </a:xfrm>
           <a:prstGeom prst="rect">
             <a:avLst/>
@@ -4042,120 +4525,26 @@
           </a:bodyPr>
           <a:lstStyle/>
           <a:p>
-            <a:pPr lvl="0" marL="457200" indent="-228600">
-              <a:buFont typeface="Calibri"/>
-              <a:spcAft>
-                <a:spcPts val="1000"/>
-              </a:spcAft>
-              <a:buSzPct val="100000"/>
-              <a:buChar char="•"/>
+            <a:pPr>
               <a:lnSpc>
                 <a:spcPts val="2200"/>
               </a:lnSpc>
             </a:pPr>
             <a:r>
-              <a:rPr sz="2000" b="0">
+              <a:rPr sz="1200" b="0">
                 <a:solidFill>
                   <a:srgbClr val="333333"/>
                 </a:solidFill>
                 <a:latin typeface="Calibri"/>
               </a:rPr>
-              <a:t>Mark macros as hard: width and height immutable</a:t>
-            </a:r>
-          </a:p>
-          <a:p>
-            <a:pPr lvl="0" marL="457200" indent="-228600">
-              <a:buFont typeface="Calibri"/>
-              <a:spcAft>
-                <a:spcPts val="1000"/>
-              </a:spcAft>
-              <a:buSzPct val="100000"/>
-              <a:buChar char="•"/>
-              <a:lnSpc>
-                <a:spcPts val="2200"/>
-              </a:lnSpc>
-            </a:pPr>
-            <a:r>
-              <a:rPr sz="2000" b="0">
-                <a:solidFill>
-                  <a:srgbClr val="333333"/>
-                </a:solidFill>
-                <a:latin typeface="Calibri"/>
-              </a:rPr>
-              <a:t>If position is fixed, lock (x, y) and forbid moves that shift them</a:t>
-            </a:r>
-          </a:p>
-          <a:p>
-            <a:pPr lvl="0" marL="457200" indent="-228600">
-              <a:buFont typeface="Calibri"/>
-              <a:spcAft>
-                <a:spcPts val="1000"/>
-              </a:spcAft>
-              <a:buSzPct val="100000"/>
-              <a:buChar char="•"/>
-              <a:lnSpc>
-                <a:spcPts val="2200"/>
-              </a:lnSpc>
-            </a:pPr>
-            <a:r>
-              <a:rPr sz="2000" b="0">
-                <a:solidFill>
-                  <a:srgbClr val="333333"/>
-                </a:solidFill>
-                <a:latin typeface="Calibri"/>
-              </a:rPr>
-              <a:t>Other modules pack in the remaining free space</a:t>
-            </a:r>
-          </a:p>
-          <a:p>
-            <a:pPr lvl="0" marL="457200" indent="-228600">
-              <a:buFont typeface="Calibri"/>
-              <a:spcAft>
-                <a:spcPts val="1000"/>
-              </a:spcAft>
-              <a:buSzPct val="100000"/>
-              <a:buChar char="•"/>
-              <a:lnSpc>
-                <a:spcPts val="2200"/>
-              </a:lnSpc>
-            </a:pPr>
-            <a:r>
-              <a:rPr sz="2000" b="0">
-                <a:solidFill>
-                  <a:srgbClr val="333333"/>
-                </a:solidFill>
-                <a:latin typeface="Calibri"/>
-              </a:rPr>
-              <a:t>Cost still includes overflow and deadspace</a:t>
-            </a:r>
-          </a:p>
-          <a:p>
-            <a:pPr lvl="0" marL="457200" indent="-228600">
-              <a:buFont typeface="Calibri"/>
-              <a:spcAft>
-                <a:spcPts val="1000"/>
-              </a:spcAft>
-              <a:buSzPct val="100000"/>
-              <a:buChar char="•"/>
-              <a:lnSpc>
-                <a:spcPts val="2200"/>
-              </a:lnSpc>
-            </a:pPr>
-            <a:r>
-              <a:rPr sz="2000" b="0">
-                <a:solidFill>
-                  <a:srgbClr val="333333"/>
-                </a:solidFill>
-                <a:latin typeface="Calibri"/>
-              </a:rPr>
-              <a:t>Legality checks apply unchanged, macros are just immovable obstacles</a:t>
-            </a:r>
-          </a:p>
-        </p:txBody>
-      </p:sp>
-      <p:sp>
-        <p:nvSpPr>
-          <p:cNvPr id="4" name="TextBox 3"/>
+              <a:t>Free golden has movable D</a:t>
+            </a:r>
+          </a:p>
+        </p:txBody>
+      </p:sp>
+      <p:sp>
+        <p:nvSpPr>
+          <p:cNvPr id="5" name="TextBox 4"/>
           <p:cNvSpPr txBox="1"/>
           <p:nvPr/>
         </p:nvSpPr>
@@ -4244,21 +4633,45 @@
                 </a:solidFill>
                 <a:latin typeface="Calibri"/>
               </a:rPr>
-              <a:t>Browser lab track</a:t>
-            </a:r>
-          </a:p>
-        </p:txBody>
-      </p:sp>
-      <p:sp>
-        <p:nvSpPr>
-          <p:cNvPr id="3" name="TextBox 2"/>
+              <a:t>Fix macro D at (0,0)</a:t>
+            </a:r>
+          </a:p>
+        </p:txBody>
+      </p:sp>
+      <p:pic>
+        <p:nvPicPr>
+          <p:cNvPr id="3" name="Picture 2" descr="02-fix-d.png"/>
+          <p:cNvPicPr>
+            <a:picLocks noChangeAspect="1"/>
+          </p:cNvPicPr>
+          <p:nvPr/>
+        </p:nvPicPr>
+        <p:blipFill>
+          <a:blip r:embed="rId2"/>
+          <a:stretch>
+            <a:fillRect/>
+          </a:stretch>
+        </p:blipFill>
+        <p:spPr>
+          <a:xfrm>
+            <a:off x="548640" y="1143000"/>
+            <a:ext cx="9424736" cy="4572000"/>
+          </a:xfrm>
+          <a:prstGeom prst="rect">
+            <a:avLst/>
+          </a:prstGeom>
+        </p:spPr>
+      </p:pic>
+      <p:sp>
+        <p:nvSpPr>
+          <p:cNvPr id="4" name="TextBox 3"/>
           <p:cNvSpPr txBox="1"/>
           <p:nvPr/>
         </p:nvSpPr>
         <p:spPr>
           <a:xfrm>
-            <a:off x="548640" y="1234440"/>
-            <a:ext cx="11064240" cy="4937760"/>
+            <a:off x="548640" y="5897880"/>
+            <a:ext cx="11064240" cy="411480"/>
           </a:xfrm>
           <a:prstGeom prst="rect">
             <a:avLst/>
@@ -4271,151 +4684,26 @@
           </a:bodyPr>
           <a:lstStyle/>
           <a:p>
-            <a:pPr lvl="0" marL="457200" indent="-228600">
-              <a:buFont typeface="Calibri"/>
-              <a:spcAft>
-                <a:spcPts val="1000"/>
-              </a:spcAft>
-              <a:buSzPct val="100000"/>
-              <a:buChar char="•"/>
+            <a:pPr>
               <a:lnSpc>
                 <a:spcPts val="2200"/>
               </a:lnSpc>
             </a:pPr>
             <a:r>
-              <a:rPr sz="2000" b="0">
+              <a:rPr sz="1200" b="0">
                 <a:solidFill>
                   <a:srgbClr val="333333"/>
                 </a:solidFill>
                 <a:latin typeface="Calibri"/>
               </a:rPr>
-              <a:t>Open </a:t>
-            </a:r>
-            <a:r>
-              <a:rPr sz="2000" b="1">
-                <a:solidFill>
-                  <a:srgbClr val="333333"/>
-                </a:solidFill>
-                <a:latin typeface="Calibri"/>
-              </a:rPr>
-              <a:t>macro-placement</a:t>
-            </a:r>
-          </a:p>
-          <a:p>
-            <a:pPr lvl="0" marL="457200" indent="-228600">
-              <a:buFont typeface="Calibri"/>
-              <a:spcAft>
-                <a:spcPts val="1000"/>
-              </a:spcAft>
-              <a:buSzPct val="100000"/>
-              <a:buChar char="•"/>
-              <a:lnSpc>
-                <a:spcPts val="2200"/>
-              </a:lnSpc>
-            </a:pPr>
-            <a:r>
-              <a:rPr sz="2000" b="0">
-                <a:solidFill>
-                  <a:srgbClr val="333333"/>
-                </a:solidFill>
-                <a:latin typeface="Calibri"/>
-              </a:rPr>
-              <a:t>Lock one module as a fixed hard block</a:t>
-            </a:r>
-          </a:p>
-          <a:p>
-            <a:pPr lvl="0" marL="457200" indent="-228600">
-              <a:buFont typeface="Calibri"/>
-              <a:spcAft>
-                <a:spcPts val="1000"/>
-              </a:spcAft>
-              <a:buSzPct val="100000"/>
-              <a:buChar char="•"/>
-              <a:lnSpc>
-                <a:spcPts val="2200"/>
-              </a:lnSpc>
-            </a:pPr>
-            <a:r>
-              <a:rPr sz="2000" b="0">
-                <a:solidFill>
-                  <a:srgbClr val="333333"/>
-                </a:solidFill>
-                <a:latin typeface="Calibri"/>
-              </a:rPr>
-              <a:t>Try to pack the others around it</a:t>
-            </a:r>
-          </a:p>
-          <a:p>
-            <a:pPr lvl="0" marL="457200" indent="-228600">
-              <a:buFont typeface="Calibri"/>
-              <a:spcAft>
-                <a:spcPts val="1000"/>
-              </a:spcAft>
-              <a:buSzPct val="100000"/>
-              <a:buChar char="•"/>
-              <a:lnSpc>
-                <a:spcPts val="2200"/>
-              </a:lnSpc>
-            </a:pPr>
-            <a:r>
-              <a:rPr sz="2000" b="0">
-                <a:solidFill>
-                  <a:srgbClr val="333333"/>
-                </a:solidFill>
-                <a:latin typeface="Calibri"/>
-              </a:rPr>
-              <a:t>Force an overlap and watch the checker</a:t>
-            </a:r>
-          </a:p>
-          <a:p>
-            <a:pPr lvl="0" marL="457200" indent="-228600">
-              <a:buFont typeface="Calibri"/>
-              <a:spcAft>
-                <a:spcPts val="1000"/>
-              </a:spcAft>
-              <a:buSzPct val="100000"/>
-              <a:buChar char="•"/>
-              <a:lnSpc>
-                <a:spcPts val="2200"/>
-              </a:lnSpc>
-            </a:pPr>
-            <a:r>
-              <a:rPr sz="2000" b="0">
-                <a:solidFill>
-                  <a:srgbClr val="333333"/>
-                </a:solidFill>
-                <a:latin typeface="Calibri"/>
-              </a:rPr>
-              <a:t>Unlock and compare freedom</a:t>
-            </a:r>
-          </a:p>
-          <a:p>
-            <a:pPr lvl="0" marL="457200" indent="-228600">
-              <a:buFont typeface="Calibri"/>
-              <a:spcAft>
-                <a:spcPts val="1000"/>
-              </a:spcAft>
-              <a:buSzPct val="100000"/>
-              <a:buChar char="•"/>
-              <a:lnSpc>
-                <a:spcPts val="2200"/>
-              </a:lnSpc>
-            </a:pPr>
-            <a:r>
-              <a:rPr sz="2000" b="0">
-                <a:solidFill>
-                  <a:srgbClr val="333333"/>
-                </a:solidFill>
-                <a:latin typeface="Calibri"/>
-              </a:rPr>
-              <a:t>Then encode fixed blocks in your Track A data model</a:t>
-            </a:r>
-          </a:p>
-        </p:txBody>
-      </p:sp>
-      <p:sp>
-        <p:nvSpPr>
-          <p:cNvPr id="4" name="TextBox 3"/>
+              <a:t>Fix macro D at (0,0)</a:t>
+            </a:r>
+          </a:p>
+        </p:txBody>
+      </p:sp>
+      <p:sp>
+        <p:nvSpPr>
+          <p:cNvPr id="5" name="TextBox 4"/>
           <p:cNvSpPr txBox="1"/>
           <p:nvPr/>
         </p:nvSpPr>
@@ -4504,21 +4792,45 @@
                 </a:solidFill>
                 <a:latin typeface="Calibri"/>
               </a:rPr>
-              <a:t>Implement track</a:t>
-            </a:r>
-          </a:p>
-        </p:txBody>
-      </p:sp>
-      <p:sp>
-        <p:nvSpPr>
-          <p:cNvPr id="3" name="TextBox 2"/>
+              <a:t>Pack A–E around the macro</a:t>
+            </a:r>
+          </a:p>
+        </p:txBody>
+      </p:sp>
+      <p:pic>
+        <p:nvPicPr>
+          <p:cNvPr id="3" name="Picture 2" descr="03-pack-rest.png"/>
+          <p:cNvPicPr>
+            <a:picLocks noChangeAspect="1"/>
+          </p:cNvPicPr>
+          <p:nvPr/>
+        </p:nvPicPr>
+        <p:blipFill>
+          <a:blip r:embed="rId2"/>
+          <a:stretch>
+            <a:fillRect/>
+          </a:stretch>
+        </p:blipFill>
+        <p:spPr>
+          <a:xfrm>
+            <a:off x="548640" y="1143000"/>
+            <a:ext cx="9424736" cy="4572000"/>
+          </a:xfrm>
+          <a:prstGeom prst="rect">
+            <a:avLst/>
+          </a:prstGeom>
+        </p:spPr>
+      </p:pic>
+      <p:sp>
+        <p:nvSpPr>
+          <p:cNvPr id="4" name="TextBox 3"/>
           <p:cNvSpPr txBox="1"/>
           <p:nvPr/>
         </p:nvSpPr>
         <p:spPr>
           <a:xfrm>
-            <a:off x="548640" y="1234440"/>
-            <a:ext cx="11064240" cy="4937760"/>
+            <a:off x="548640" y="5897880"/>
+            <a:ext cx="11064240" cy="411480"/>
           </a:xfrm>
           <a:prstGeom prst="rect">
             <a:avLst/>
@@ -4531,98 +4843,26 @@
           </a:bodyPr>
           <a:lstStyle/>
           <a:p>
-            <a:pPr lvl="0" marL="457200" indent="-228600">
-              <a:buFont typeface="Calibri"/>
-              <a:spcAft>
-                <a:spcPts val="1000"/>
-              </a:spcAft>
-              <a:buSzPct val="100000"/>
-              <a:buChar char="•"/>
+            <a:pPr>
               <a:lnSpc>
                 <a:spcPts val="2200"/>
               </a:lnSpc>
             </a:pPr>
             <a:r>
-              <a:rPr sz="2000" b="0">
+              <a:rPr sz="1200" b="0">
                 <a:solidFill>
                   <a:srgbClr val="333333"/>
                 </a:solidFill>
                 <a:latin typeface="Calibri"/>
               </a:rPr>
-              <a:t>Extend `tiny_modules.json` with a `fixed: true` and optional `x`, `y` on one module</a:t>
-            </a:r>
-          </a:p>
-          <a:p>
-            <a:pPr lvl="0" marL="457200" indent="-228600">
-              <a:buFont typeface="Calibri"/>
-              <a:spcAft>
-                <a:spcPts val="1000"/>
-              </a:spcAft>
-              <a:buSzPct val="100000"/>
-              <a:buChar char="•"/>
-              <a:lnSpc>
-                <a:spcPts val="2200"/>
-              </a:lnSpc>
-            </a:pPr>
-            <a:r>
-              <a:rPr sz="2000" b="0">
-                <a:solidFill>
-                  <a:srgbClr val="333333"/>
-                </a:solidFill>
-                <a:latin typeface="Calibri"/>
-              </a:rPr>
-              <a:t>Pack the rest with your chosen representation, treating the macro as an obstacle</a:t>
-            </a:r>
-          </a:p>
-          <a:p>
-            <a:pPr lvl="0" marL="457200" indent="-228600">
-              <a:buFont typeface="Calibri"/>
-              <a:spcAft>
-                <a:spcPts val="1000"/>
-              </a:spcAft>
-              <a:buSzPct val="100000"/>
-              <a:buChar char="•"/>
-              <a:lnSpc>
-                <a:spcPts val="2200"/>
-              </a:lnSpc>
-            </a:pPr>
-            <a:r>
-              <a:rPr sz="2000" b="0">
-                <a:solidFill>
-                  <a:srgbClr val="333333"/>
-                </a:solidFill>
-                <a:latin typeface="Calibri"/>
-              </a:rPr>
-              <a:t>Fail loudly if a move would shift a fixed macro</a:t>
-            </a:r>
-          </a:p>
-          <a:p>
-            <a:pPr lvl="0" marL="457200" indent="-228600">
-              <a:buFont typeface="Calibri"/>
-              <a:spcAft>
-                <a:spcPts val="1000"/>
-              </a:spcAft>
-              <a:buSzPct val="100000"/>
-              <a:buChar char="•"/>
-              <a:lnSpc>
-                <a:spcPts val="2200"/>
-              </a:lnSpc>
-            </a:pPr>
-            <a:r>
-              <a:rPr sz="2000" b="0">
-                <a:solidFill>
-                  <a:srgbClr val="333333"/>
-                </a:solidFill>
-                <a:latin typeface="Calibri"/>
-              </a:rPr>
-              <a:t>Report legality and deadspace</a:t>
-            </a:r>
-          </a:p>
-        </p:txBody>
-      </p:sp>
-      <p:sp>
-        <p:nvSpPr>
-          <p:cNvPr id="4" name="TextBox 3"/>
+              <a:t>Pack A–E around the macro</a:t>
+            </a:r>
+          </a:p>
+        </p:txBody>
+      </p:sp>
+      <p:sp>
+        <p:nvSpPr>
+          <p:cNvPr id="5" name="TextBox 4"/>
           <p:cNvSpPr txBox="1"/>
           <p:nvPr/>
         </p:nvSpPr>
@@ -4711,21 +4951,45 @@
                 </a:solidFill>
                 <a:latin typeface="Calibri"/>
               </a:rPr>
-              <a:t>Pitfalls</a:t>
-            </a:r>
-          </a:p>
-        </p:txBody>
-      </p:sp>
-      <p:sp>
-        <p:nvSpPr>
-          <p:cNvPr id="3" name="TextBox 2"/>
+              <a:t>Macro packing is legal</a:t>
+            </a:r>
+          </a:p>
+        </p:txBody>
+      </p:sp>
+      <p:pic>
+        <p:nvPicPr>
+          <p:cNvPr id="3" name="Picture 2" descr="04-legal.png"/>
+          <p:cNvPicPr>
+            <a:picLocks noChangeAspect="1"/>
+          </p:cNvPicPr>
+          <p:nvPr/>
+        </p:nvPicPr>
+        <p:blipFill>
+          <a:blip r:embed="rId2"/>
+          <a:stretch>
+            <a:fillRect/>
+          </a:stretch>
+        </p:blipFill>
+        <p:spPr>
+          <a:xfrm>
+            <a:off x="548640" y="1143000"/>
+            <a:ext cx="9424736" cy="4572000"/>
+          </a:xfrm>
+          <a:prstGeom prst="rect">
+            <a:avLst/>
+          </a:prstGeom>
+        </p:spPr>
+      </p:pic>
+      <p:sp>
+        <p:nvSpPr>
+          <p:cNvPr id="4" name="TextBox 3"/>
           <p:cNvSpPr txBox="1"/>
           <p:nvPr/>
         </p:nvSpPr>
         <p:spPr>
           <a:xfrm>
-            <a:off x="548640" y="1234440"/>
-            <a:ext cx="11064240" cy="4937760"/>
+            <a:off x="548640" y="5897880"/>
+            <a:ext cx="11064240" cy="411480"/>
           </a:xfrm>
           <a:prstGeom prst="rect">
             <a:avLst/>
@@ -4738,76 +5002,26 @@
           </a:bodyPr>
           <a:lstStyle/>
           <a:p>
-            <a:pPr lvl="0" marL="457200" indent="-228600">
-              <a:buFont typeface="Calibri"/>
-              <a:spcAft>
-                <a:spcPts val="1000"/>
-              </a:spcAft>
-              <a:buSzPct val="100000"/>
-              <a:buChar char="•"/>
+            <a:pPr>
               <a:lnSpc>
                 <a:spcPts val="2200"/>
               </a:lnSpc>
             </a:pPr>
             <a:r>
-              <a:rPr sz="2000" b="0">
+              <a:rPr sz="1200" b="0">
                 <a:solidFill>
                   <a:srgbClr val="333333"/>
                 </a:solidFill>
                 <a:latin typeface="Calibri"/>
               </a:rPr>
-              <a:t>Silently moving a “fixed” macro during SA is a trust-breaking bug</a:t>
-            </a:r>
-          </a:p>
-          <a:p>
-            <a:pPr lvl="0" marL="457200" indent="-228600">
-              <a:buFont typeface="Calibri"/>
-              <a:spcAft>
-                <a:spcPts val="1000"/>
-              </a:spcAft>
-              <a:buSzPct val="100000"/>
-              <a:buChar char="•"/>
-              <a:lnSpc>
-                <a:spcPts val="2200"/>
-              </a:lnSpc>
-            </a:pPr>
-            <a:r>
-              <a:rPr sz="2000" b="0">
-                <a:solidFill>
-                  <a:srgbClr val="333333"/>
-                </a:solidFill>
-                <a:latin typeface="Calibri"/>
-              </a:rPr>
-              <a:t>Also don’t shrink hard macros when soft sizing runs</a:t>
-            </a:r>
-          </a:p>
-          <a:p>
-            <a:pPr lvl="0" marL="457200" indent="-228600">
-              <a:buFont typeface="Calibri"/>
-              <a:spcAft>
-                <a:spcPts val="1000"/>
-              </a:spcAft>
-              <a:buSzPct val="100000"/>
-              <a:buChar char="•"/>
-              <a:lnSpc>
-                <a:spcPts val="2200"/>
-              </a:lnSpc>
-            </a:pPr>
-            <a:r>
-              <a:rPr sz="2000" b="0">
-                <a:solidFill>
-                  <a:srgbClr val="333333"/>
-                </a:solidFill>
-                <a:latin typeface="Calibri"/>
-              </a:rPr>
-              <a:t>Overlapping two macros at init means the instance is already illegal</a:t>
-            </a:r>
-          </a:p>
-        </p:txBody>
-      </p:sp>
-      <p:sp>
-        <p:nvSpPr>
-          <p:cNvPr id="4" name="TextBox 3"/>
+              <a:t>Macro packing is legal</a:t>
+            </a:r>
+          </a:p>
+        </p:txBody>
+      </p:sp>
+      <p:sp>
+        <p:nvSpPr>
+          <p:cNvPr id="5" name="TextBox 4"/>
           <p:cNvSpPr txBox="1"/>
           <p:nvPr/>
         </p:nvSpPr>
@@ -4896,7 +5110,166 @@
                 </a:solidFill>
                 <a:latin typeface="Calibri"/>
               </a:rPr>
-              <a:t>Your turn</a:t>
+              <a:t>Macros first, then cells</a:t>
+            </a:r>
+          </a:p>
+        </p:txBody>
+      </p:sp>
+      <p:pic>
+        <p:nvPicPr>
+          <p:cNvPr id="3" name="Picture 2" descr="05-takeaway.png"/>
+          <p:cNvPicPr>
+            <a:picLocks noChangeAspect="1"/>
+          </p:cNvPicPr>
+          <p:nvPr/>
+        </p:nvPicPr>
+        <p:blipFill>
+          <a:blip r:embed="rId2"/>
+          <a:stretch>
+            <a:fillRect/>
+          </a:stretch>
+        </p:blipFill>
+        <p:spPr>
+          <a:xfrm>
+            <a:off x="548640" y="1143000"/>
+            <a:ext cx="9424736" cy="4572000"/>
+          </a:xfrm>
+          <a:prstGeom prst="rect">
+            <a:avLst/>
+          </a:prstGeom>
+        </p:spPr>
+      </p:pic>
+      <p:sp>
+        <p:nvSpPr>
+          <p:cNvPr id="4" name="TextBox 3"/>
+          <p:cNvSpPr txBox="1"/>
+          <p:nvPr/>
+        </p:nvSpPr>
+        <p:spPr>
+          <a:xfrm>
+            <a:off x="548640" y="5897880"/>
+            <a:ext cx="11064240" cy="411480"/>
+          </a:xfrm>
+          <a:prstGeom prst="rect">
+            <a:avLst/>
+          </a:prstGeom>
+          <a:noFill/>
+        </p:spPr>
+        <p:txBody>
+          <a:bodyPr wrap="square">
+            <a:noAutofit/>
+          </a:bodyPr>
+          <a:lstStyle/>
+          <a:p>
+            <a:pPr>
+              <a:lnSpc>
+                <a:spcPts val="2200"/>
+              </a:lnSpc>
+            </a:pPr>
+            <a:r>
+              <a:rPr sz="1200" b="0">
+                <a:solidFill>
+                  <a:srgbClr val="333333"/>
+                </a:solidFill>
+                <a:latin typeface="Calibri"/>
+              </a:rPr>
+              <a:t>Macros first, then cells</a:t>
+            </a:r>
+          </a:p>
+        </p:txBody>
+      </p:sp>
+      <p:sp>
+        <p:nvSpPr>
+          <p:cNvPr id="5" name="TextBox 4"/>
+          <p:cNvSpPr txBox="1"/>
+          <p:nvPr/>
+        </p:nvSpPr>
+        <p:spPr>
+          <a:xfrm>
+            <a:off x="548640" y="6355080"/>
+            <a:ext cx="11064240" cy="320040"/>
+          </a:xfrm>
+          <a:prstGeom prst="rect">
+            <a:avLst/>
+          </a:prstGeom>
+          <a:noFill/>
+        </p:spPr>
+        <p:txBody>
+          <a:bodyPr wrap="square">
+            <a:noAutofit/>
+          </a:bodyPr>
+          <a:lstStyle/>
+          <a:p>
+            <a:pPr algn="r">
+              <a:lnSpc>
+                <a:spcPts val="2200"/>
+              </a:lnSpc>
+              <a:defRPr sz="1000" b="0">
+                <a:solidFill>
+                  <a:srgbClr val="666666"/>
+                </a:solidFill>
+                <a:latin typeface="Calibri"/>
+              </a:defRPr>
+            </a:pPr>
+            <a:r>
+              <a:t>learn_floorplanning — 05 macro placement</a:t>
+            </a:r>
+          </a:p>
+        </p:txBody>
+      </p:sp>
+    </p:spTree>
+  </p:cSld>
+  <p:clrMapOvr>
+    <a:masterClrMapping/>
+  </p:clrMapOvr>
+</p:sld>
+</file>
+
+<file path=ppt/slides/slide7.xml><?xml version="1.0" encoding="utf-8"?>
+<p:sld xmlns:a="http://schemas.openxmlformats.org/drawingml/2006/main" xmlns:p="http://schemas.openxmlformats.org/presentationml/2006/main" xmlns:r="http://schemas.openxmlformats.org/officeDocument/2006/relationships">
+  <p:cSld>
+    <p:spTree>
+      <p:nvGrpSpPr>
+        <p:cNvPr id="1" name=""/>
+        <p:cNvGrpSpPr/>
+        <p:nvPr/>
+      </p:nvGrpSpPr>
+      <p:grpSpPr/>
+      <p:sp>
+        <p:nvSpPr>
+          <p:cNvPr id="2" name="TextBox 1"/>
+          <p:cNvSpPr txBox="1"/>
+          <p:nvPr/>
+        </p:nvSpPr>
+        <p:spPr>
+          <a:xfrm>
+            <a:off x="548640" y="411480"/>
+            <a:ext cx="11064240" cy="777240"/>
+          </a:xfrm>
+          <a:prstGeom prst="rect">
+            <a:avLst/>
+          </a:prstGeom>
+          <a:noFill/>
+        </p:spPr>
+        <p:txBody>
+          <a:bodyPr wrap="square">
+            <a:noAutofit/>
+          </a:bodyPr>
+          <a:lstStyle/>
+          <a:p>
+            <a:pPr>
+              <a:lnSpc>
+                <a:spcPts val="2200"/>
+              </a:lnSpc>
+            </a:pPr>
+            <a:r>
+              <a:rPr sz="2800" b="1">
+                <a:solidFill>
+                  <a:srgbClr val="1A1A2E"/>
+                </a:solidFill>
+                <a:latin typeface="Calibri"/>
+              </a:rPr>
+              <a:t>Browser lab track</a:t>
             </a:r>
           </a:p>
         </p:txBody>
@@ -4941,7 +5314,7 @@
                 </a:solidFill>
                 <a:latin typeface="Calibri"/>
               </a:rPr>
-              <a:t>Produce a legal packing with at least one fixed hard macro</a:t>
+              <a:t>Open macro-placement</a:t>
             </a:r>
           </a:p>
           <a:p>
@@ -4963,7 +5336,333 @@
                 </a:solidFill>
                 <a:latin typeface="Calibri"/>
               </a:rPr>
-              <a:t>Next: hierarchical floorplans that nest sub-packings inside parent regions</a:t>
+              <a:t>Compare free golden D at zero comma two with Place macros: D at zero comma zero</a:t>
+            </a:r>
+          </a:p>
+          <a:p>
+            <a:pPr lvl="0" marL="457200" indent="-228600">
+              <a:buFont typeface="Calibri"/>
+              <a:spcAft>
+                <a:spcPts val="1000"/>
+              </a:spcAft>
+              <a:buSzPct val="100000"/>
+              <a:buChar char="•"/>
+              <a:lnSpc>
+                <a:spcPts val="2200"/>
+              </a:lnSpc>
+            </a:pPr>
+            <a:r>
+              <a:rPr sz="2000" b="0">
+                <a:solidFill>
+                  <a:srgbClr val="333333"/>
+                </a:solidFill>
+                <a:latin typeface="Calibri"/>
+              </a:rPr>
+              <a:t>Confirm legality and the macro flag</a:t>
+            </a:r>
+          </a:p>
+        </p:txBody>
+      </p:sp>
+      <p:sp>
+        <p:nvSpPr>
+          <p:cNvPr id="4" name="TextBox 3"/>
+          <p:cNvSpPr txBox="1"/>
+          <p:nvPr/>
+        </p:nvSpPr>
+        <p:spPr>
+          <a:xfrm>
+            <a:off x="548640" y="6355080"/>
+            <a:ext cx="11064240" cy="320040"/>
+          </a:xfrm>
+          <a:prstGeom prst="rect">
+            <a:avLst/>
+          </a:prstGeom>
+          <a:noFill/>
+        </p:spPr>
+        <p:txBody>
+          <a:bodyPr wrap="square">
+            <a:noAutofit/>
+          </a:bodyPr>
+          <a:lstStyle/>
+          <a:p>
+            <a:pPr algn="r">
+              <a:lnSpc>
+                <a:spcPts val="2200"/>
+              </a:lnSpc>
+              <a:defRPr sz="1000" b="0">
+                <a:solidFill>
+                  <a:srgbClr val="666666"/>
+                </a:solidFill>
+                <a:latin typeface="Calibri"/>
+              </a:defRPr>
+            </a:pPr>
+            <a:r>
+              <a:t>learn_floorplanning — 05 macro placement</a:t>
+            </a:r>
+          </a:p>
+        </p:txBody>
+      </p:sp>
+    </p:spTree>
+  </p:cSld>
+  <p:clrMapOvr>
+    <a:masterClrMapping/>
+  </p:clrMapOvr>
+</p:sld>
+</file>
+
+<file path=ppt/slides/slide8.xml><?xml version="1.0" encoding="utf-8"?>
+<p:sld xmlns:a="http://schemas.openxmlformats.org/drawingml/2006/main" xmlns:p="http://schemas.openxmlformats.org/presentationml/2006/main" xmlns:r="http://schemas.openxmlformats.org/officeDocument/2006/relationships">
+  <p:cSld>
+    <p:spTree>
+      <p:nvGrpSpPr>
+        <p:cNvPr id="1" name=""/>
+        <p:cNvGrpSpPr/>
+        <p:nvPr/>
+      </p:nvGrpSpPr>
+      <p:grpSpPr/>
+      <p:sp>
+        <p:nvSpPr>
+          <p:cNvPr id="2" name="TextBox 1"/>
+          <p:cNvSpPr txBox="1"/>
+          <p:nvPr/>
+        </p:nvSpPr>
+        <p:spPr>
+          <a:xfrm>
+            <a:off x="548640" y="411480"/>
+            <a:ext cx="11064240" cy="777240"/>
+          </a:xfrm>
+          <a:prstGeom prst="rect">
+            <a:avLst/>
+          </a:prstGeom>
+          <a:noFill/>
+        </p:spPr>
+        <p:txBody>
+          <a:bodyPr wrap="square">
+            <a:noAutofit/>
+          </a:bodyPr>
+          <a:lstStyle/>
+          <a:p>
+            <a:pPr>
+              <a:lnSpc>
+                <a:spcPts val="2200"/>
+              </a:lnSpc>
+            </a:pPr>
+            <a:r>
+              <a:rPr sz="2800" b="1">
+                <a:solidFill>
+                  <a:srgbClr val="1A1A2E"/>
+                </a:solidFill>
+                <a:latin typeface="Calibri"/>
+              </a:rPr>
+              <a:t>Implement track</a:t>
+            </a:r>
+          </a:p>
+        </p:txBody>
+      </p:sp>
+      <p:sp>
+        <p:nvSpPr>
+          <p:cNvPr id="3" name="TextBox 2"/>
+          <p:cNvSpPr txBox="1"/>
+          <p:nvPr/>
+        </p:nvSpPr>
+        <p:spPr>
+          <a:xfrm>
+            <a:off x="548640" y="1234440"/>
+            <a:ext cx="11064240" cy="4937760"/>
+          </a:xfrm>
+          <a:prstGeom prst="rect">
+            <a:avLst/>
+          </a:prstGeom>
+          <a:noFill/>
+        </p:spPr>
+        <p:txBody>
+          <a:bodyPr wrap="square">
+            <a:noAutofit/>
+          </a:bodyPr>
+          <a:lstStyle/>
+          <a:p>
+            <a:pPr lvl="0" marL="457200" indent="-228600">
+              <a:buFont typeface="Calibri"/>
+              <a:spcAft>
+                <a:spcPts val="1000"/>
+              </a:spcAft>
+              <a:buSzPct val="100000"/>
+              <a:buChar char="•"/>
+              <a:lnSpc>
+                <a:spcPts val="2200"/>
+              </a:lnSpc>
+            </a:pPr>
+            <a:r>
+              <a:rPr sz="2000" b="0">
+                <a:solidFill>
+                  <a:srgbClr val="333333"/>
+                </a:solidFill>
+                <a:latin typeface="Calibri"/>
+              </a:rPr>
+              <a:t>Fix D, pack the rest, assert D at (0,0), D.macro true, and is_legal_packing true</a:t>
+            </a:r>
+          </a:p>
+          <a:p>
+            <a:pPr lvl="0" marL="457200" indent="-228600">
+              <a:buFont typeface="Calibri"/>
+              <a:spcAft>
+                <a:spcPts val="1000"/>
+              </a:spcAft>
+              <a:buSzPct val="100000"/>
+              <a:buChar char="•"/>
+              <a:lnSpc>
+                <a:spcPts val="2200"/>
+              </a:lnSpc>
+            </a:pPr>
+            <a:r>
+              <a:rPr sz="2000" b="0">
+                <a:solidFill>
+                  <a:srgbClr val="333333"/>
+                </a:solidFill>
+                <a:latin typeface="Calibri"/>
+              </a:rPr>
+              <a:t>Note the free golden differs</a:t>
+            </a:r>
+          </a:p>
+        </p:txBody>
+      </p:sp>
+      <p:sp>
+        <p:nvSpPr>
+          <p:cNvPr id="4" name="TextBox 3"/>
+          <p:cNvSpPr txBox="1"/>
+          <p:nvPr/>
+        </p:nvSpPr>
+        <p:spPr>
+          <a:xfrm>
+            <a:off x="548640" y="6355080"/>
+            <a:ext cx="11064240" cy="320040"/>
+          </a:xfrm>
+          <a:prstGeom prst="rect">
+            <a:avLst/>
+          </a:prstGeom>
+          <a:noFill/>
+        </p:spPr>
+        <p:txBody>
+          <a:bodyPr wrap="square">
+            <a:noAutofit/>
+          </a:bodyPr>
+          <a:lstStyle/>
+          <a:p>
+            <a:pPr algn="r">
+              <a:lnSpc>
+                <a:spcPts val="2200"/>
+              </a:lnSpc>
+              <a:defRPr sz="1000" b="0">
+                <a:solidFill>
+                  <a:srgbClr val="666666"/>
+                </a:solidFill>
+                <a:latin typeface="Calibri"/>
+              </a:defRPr>
+            </a:pPr>
+            <a:r>
+              <a:t>learn_floorplanning — 05 macro placement</a:t>
+            </a:r>
+          </a:p>
+        </p:txBody>
+      </p:sp>
+    </p:spTree>
+  </p:cSld>
+  <p:clrMapOvr>
+    <a:masterClrMapping/>
+  </p:clrMapOvr>
+</p:sld>
+</file>
+
+<file path=ppt/slides/slide9.xml><?xml version="1.0" encoding="utf-8"?>
+<p:sld xmlns:a="http://schemas.openxmlformats.org/drawingml/2006/main" xmlns:p="http://schemas.openxmlformats.org/presentationml/2006/main" xmlns:r="http://schemas.openxmlformats.org/officeDocument/2006/relationships">
+  <p:cSld>
+    <p:spTree>
+      <p:nvGrpSpPr>
+        <p:cNvPr id="1" name=""/>
+        <p:cNvGrpSpPr/>
+        <p:nvPr/>
+      </p:nvGrpSpPr>
+      <p:grpSpPr/>
+      <p:sp>
+        <p:nvSpPr>
+          <p:cNvPr id="2" name="TextBox 1"/>
+          <p:cNvSpPr txBox="1"/>
+          <p:nvPr/>
+        </p:nvSpPr>
+        <p:spPr>
+          <a:xfrm>
+            <a:off x="548640" y="411480"/>
+            <a:ext cx="11064240" cy="777240"/>
+          </a:xfrm>
+          <a:prstGeom prst="rect">
+            <a:avLst/>
+          </a:prstGeom>
+          <a:noFill/>
+        </p:spPr>
+        <p:txBody>
+          <a:bodyPr wrap="square">
+            <a:noAutofit/>
+          </a:bodyPr>
+          <a:lstStyle/>
+          <a:p>
+            <a:pPr>
+              <a:lnSpc>
+                <a:spcPts val="2200"/>
+              </a:lnSpc>
+            </a:pPr>
+            <a:r>
+              <a:rPr sz="2800" b="1">
+                <a:solidFill>
+                  <a:srgbClr val="1A1A2E"/>
+                </a:solidFill>
+                <a:latin typeface="Calibri"/>
+              </a:rPr>
+              <a:t>Pitfalls</a:t>
+            </a:r>
+          </a:p>
+        </p:txBody>
+      </p:sp>
+      <p:sp>
+        <p:nvSpPr>
+          <p:cNvPr id="3" name="TextBox 2"/>
+          <p:cNvSpPr txBox="1"/>
+          <p:nvPr/>
+        </p:nvSpPr>
+        <p:spPr>
+          <a:xfrm>
+            <a:off x="548640" y="1234440"/>
+            <a:ext cx="11064240" cy="4937760"/>
+          </a:xfrm>
+          <a:prstGeom prst="rect">
+            <a:avLst/>
+          </a:prstGeom>
+          <a:noFill/>
+        </p:spPr>
+        <p:txBody>
+          <a:bodyPr wrap="square">
+            <a:noAutofit/>
+          </a:bodyPr>
+          <a:lstStyle/>
+          <a:p>
+            <a:pPr lvl="0" marL="457200" indent="-228600">
+              <a:buFont typeface="Calibri"/>
+              <a:spcAft>
+                <a:spcPts val="1000"/>
+              </a:spcAft>
+              <a:buSzPct val="100000"/>
+              <a:buChar char="•"/>
+              <a:lnSpc>
+                <a:spcPts val="2200"/>
+              </a:lnSpc>
+            </a:pPr>
+            <a:r>
+              <a:rPr sz="2000" b="0">
+                <a:solidFill>
+                  <a:srgbClr val="333333"/>
+                </a:solidFill>
+                <a:latin typeface="Calibri"/>
+              </a:rPr>
+              <a:t>Moving macros after fixing them</a:t>
             </a:r>
           </a:p>
         </p:txBody>

--- a/courses/learn_floorplanning/module03-05-macro-placement/slides.pptx
+++ b/courses/learn_floorplanning/module03-05-macro-placement/slides.pptx
@@ -15,6 +15,9 @@
     <p:sldId id="263" r:id="rId15"/>
     <p:sldId id="264" r:id="rId16"/>
     <p:sldId id="265" r:id="rId17"/>
+    <p:sldId id="266" r:id="rId18"/>
+    <p:sldId id="267" r:id="rId19"/>
+    <p:sldId id="268" r:id="rId20"/>
   </p:sldIdLst>
   <p:sldSz cx="12191695" cy="6858000" type="screen4x3"/>
   <p:notesSz cx="6858000" cy="9144000"/>
@@ -514,12 +517,6 @@
               <a:t>Macros are hard fixed rectangles. In macro mode, D is pinned at zero comma zero with macro true, size three by one. A stacks above; B, C, and E pack to the right—still legal.</a:t>
             </a:r>
           </a:p>
-          <a:p/>
-          <a:p>
-            <a:r>
-              <a:t>&lt;!-- algorithm-walkthrough --&gt;</a:t>
-            </a:r>
-          </a:p>
         </p:txBody>
       </p:sp>
       <p:sp>
@@ -587,6 +584,146 @@
           <a:lstStyle/>
           <a:p>
             <a:r>
+              <a:t>Fix D, pack the rest, assert D at (0,0), D.macro true, and is_legal_packing true. Note the free golden differs.</a:t>
+            </a:r>
+          </a:p>
+        </p:txBody>
+      </p:sp>
+      <p:sp>
+        <p:nvSpPr>
+          <p:cNvPr id="4" name="Slide Number Placeholder 3"/>
+          <p:cNvSpPr>
+            <a:spLocks noGrp="1"/>
+          </p:cNvSpPr>
+          <p:nvPr>
+            <p:ph type="sldNum" idx="5" sz="quarter"/>
+          </p:nvPr>
+        </p:nvSpPr>
+        <p:spPr/>
+      </p:sp>
+    </p:spTree>
+  </p:cSld>
+  <p:clrMapOvr>
+    <a:masterClrMapping/>
+  </p:clrMapOvr>
+</p:notes>
+</file>
+
+<file path=ppt/notesSlides/notesSlide11.xml><?xml version="1.0" encoding="utf-8"?>
+<p:notes xmlns:a="http://schemas.openxmlformats.org/drawingml/2006/main" xmlns:p="http://schemas.openxmlformats.org/presentationml/2006/main" xmlns:r="http://schemas.openxmlformats.org/officeDocument/2006/relationships">
+  <p:cSld>
+    <p:spTree>
+      <p:nvGrpSpPr>
+        <p:cNvPr id="1" name=""/>
+        <p:cNvGrpSpPr/>
+        <p:nvPr/>
+      </p:nvGrpSpPr>
+      <p:grpSpPr>
+        <a:xfrm>
+          <a:off x="0" y="0"/>
+          <a:ext cx="0" cy="0"/>
+          <a:chOff x="0" y="0"/>
+          <a:chExt cx="0" cy="0"/>
+        </a:xfrm>
+      </p:grpSpPr>
+      <p:sp>
+        <p:nvSpPr>
+          <p:cNvPr id="2" name="Slide Image Placeholder 1"/>
+          <p:cNvSpPr>
+            <a:spLocks noGrp="1"/>
+          </p:cNvSpPr>
+          <p:nvPr>
+            <p:ph type="sldImg" idx="2"/>
+          </p:nvPr>
+        </p:nvSpPr>
+        <p:spPr/>
+      </p:sp>
+      <p:sp>
+        <p:nvSpPr>
+          <p:cNvPr id="3" name="Notes Placeholder 2"/>
+          <p:cNvSpPr>
+            <a:spLocks noGrp="1"/>
+          </p:cNvSpPr>
+          <p:nvPr>
+            <p:ph type="body" idx="3" sz="quarter"/>
+          </p:nvPr>
+        </p:nvSpPr>
+        <p:spPr/>
+        <p:txBody>
+          <a:bodyPr/>
+          <a:lstStyle/>
+          <a:p>
+            <a:r>
+              <a:t>Moving macros after fixing them; shrinking macro size; allowing overlaps against the fixed block.</a:t>
+            </a:r>
+          </a:p>
+        </p:txBody>
+      </p:sp>
+      <p:sp>
+        <p:nvSpPr>
+          <p:cNvPr id="4" name="Slide Number Placeholder 3"/>
+          <p:cNvSpPr>
+            <a:spLocks noGrp="1"/>
+          </p:cNvSpPr>
+          <p:nvPr>
+            <p:ph type="sldNum" idx="5" sz="quarter"/>
+          </p:nvPr>
+        </p:nvSpPr>
+        <p:spPr/>
+      </p:sp>
+    </p:spTree>
+  </p:cSld>
+  <p:clrMapOvr>
+    <a:masterClrMapping/>
+  </p:clrMapOvr>
+</p:notes>
+</file>
+
+<file path=ppt/notesSlides/notesSlide12.xml><?xml version="1.0" encoding="utf-8"?>
+<p:notes xmlns:a="http://schemas.openxmlformats.org/drawingml/2006/main" xmlns:p="http://schemas.openxmlformats.org/presentationml/2006/main" xmlns:r="http://schemas.openxmlformats.org/officeDocument/2006/relationships">
+  <p:cSld>
+    <p:spTree>
+      <p:nvGrpSpPr>
+        <p:cNvPr id="1" name=""/>
+        <p:cNvGrpSpPr/>
+        <p:nvPr/>
+      </p:nvGrpSpPr>
+      <p:grpSpPr>
+        <a:xfrm>
+          <a:off x="0" y="0"/>
+          <a:ext cx="0" cy="0"/>
+          <a:chOff x="0" y="0"/>
+          <a:chExt cx="0" cy="0"/>
+        </a:xfrm>
+      </p:grpSpPr>
+      <p:sp>
+        <p:nvSpPr>
+          <p:cNvPr id="2" name="Slide Image Placeholder 1"/>
+          <p:cNvSpPr>
+            <a:spLocks noGrp="1"/>
+          </p:cNvSpPr>
+          <p:nvPr>
+            <p:ph type="sldImg" idx="2"/>
+          </p:nvPr>
+        </p:nvSpPr>
+        <p:spPr/>
+      </p:sp>
+      <p:sp>
+        <p:nvSpPr>
+          <p:cNvPr id="3" name="Notes Placeholder 2"/>
+          <p:cNvSpPr>
+            <a:spLocks noGrp="1"/>
+          </p:cNvSpPr>
+          <p:nvPr>
+            <p:ph type="body" idx="3" sz="quarter"/>
+          </p:nvPr>
+        </p:nvSpPr>
+        <p:spPr/>
+        <p:txBody>
+          <a:bodyPr/>
+          <a:lstStyle/>
+          <a:p>
+            <a:r>
               <a:t>Ship the legal macro packing. Next: hierarchical AB left and CDE right at offset five.</a:t>
             </a:r>
           </a:p>
@@ -657,7 +794,13 @@
           <a:lstStyle/>
           <a:p>
             <a:r>
-              <a:t>In the free golden packing, D sits at zero comma two above A. Nothing is flagged as a hard macro yet.</a:t>
+              <a:t>Macro placement locks hard blocks first. Free modules pack around those obstacles; legality fails if a macro drifts.</a:t>
+            </a:r>
+          </a:p>
+          <a:p/>
+          <a:p>
+            <a:r>
+              <a:t>Open this module's examples file and find the Pseudocode section. That written sketch is what you implement on the implement track and what the browser challenges measure.</a:t>
             </a:r>
           </a:p>
         </p:txBody>
@@ -727,7 +870,7 @@
           <a:lstStyle/>
           <a:p>
             <a:r>
-              <a:t>Macro mode pins hard block D at the origin and marks it macro true. Soft and standard cells must pack around that fixed rectangle.</a:t>
+              <a:t>Free golden has movable D at zero comma two. Macro teaching pack pins D at zero comma zero with macro true and the rest legal.</a:t>
             </a:r>
           </a:p>
         </p:txBody>
@@ -797,7 +940,7 @@
           <a:lstStyle/>
           <a:p>
             <a:r>
-              <a:t>A stacks above D; B, C, and E fill to the right. The macro packing differs from the free golden—D no longer sits at zero comma two.</a:t>
+              <a:t>In the free golden packing, D sits at zero comma two above A. Nothing is flagged as a hard macro yet.</a:t>
             </a:r>
           </a:p>
         </p:txBody>
@@ -867,7 +1010,7 @@
           <a:lstStyle/>
           <a:p>
             <a:r>
-              <a:t>Despite the fixed block, the packing stays legal: no overflow, no overlaps. Fixed macros constrain search but do not excuse illegality.</a:t>
+              <a:t>Macro mode pins hard block D at the origin and marks it macro true. Soft and standard cells must pack around that fixed rectangle.</a:t>
             </a:r>
           </a:p>
         </p:txBody>
@@ -937,13 +1080,7 @@
           <a:lstStyle/>
           <a:p>
             <a:r>
-              <a:t>Industrial flows often place large macros before standard cells. Treat fixed rectangles as hard constraints, then optimize the rest.</a:t>
-            </a:r>
-          </a:p>
-          <a:p/>
-          <a:p>
-            <a:r>
-              <a:t>&lt;!-- /algorithm-walkthrough --&gt;</a:t>
+              <a:t>A stacks above D; B, C, and E fill to the right. The macro packing differs from the free golden—D no longer sits at zero comma two.</a:t>
             </a:r>
           </a:p>
         </p:txBody>
@@ -1013,7 +1150,7 @@
           <a:lstStyle/>
           <a:p>
             <a:r>
-              <a:t>Open macro-placement. Compare free golden D at zero comma two with Place macros: D at zero comma zero. Confirm legality and the macro flag.</a:t>
+              <a:t>Despite the fixed block, the packing stays legal: no overflow, no overlaps. Fixed macros constrain search but do not excuse illegality.</a:t>
             </a:r>
           </a:p>
         </p:txBody>
@@ -1083,7 +1220,7 @@
           <a:lstStyle/>
           <a:p>
             <a:r>
-              <a:t>Fix D, pack the rest, assert D at (0,0), D.macro true, and is_legal_packing true. Note the free golden differs.</a:t>
+              <a:t>Industrial flows often place large macros before standard cells. Treat fixed rectangles as hard constraints, then optimize the rest.</a:t>
             </a:r>
           </a:p>
         </p:txBody>
@@ -1153,7 +1290,7 @@
           <a:lstStyle/>
           <a:p>
             <a:r>
-              <a:t>Moving macros after fixing them; shrinking macro size; allowing overlaps against the fixed block.</a:t>
+              <a:t>Open macro-placement. Compare free golden D at zero comma two with Place macros: D at zero comma zero. Confirm legality and the macro flag.</a:t>
             </a:r>
           </a:p>
         </p:txBody>
@@ -4311,6 +4448,495 @@
                 </a:solidFill>
                 <a:latin typeface="Calibri"/>
               </a:rPr>
+              <a:t>Browser lab track</a:t>
+            </a:r>
+          </a:p>
+        </p:txBody>
+      </p:sp>
+      <p:sp>
+        <p:nvSpPr>
+          <p:cNvPr id="3" name="TextBox 2"/>
+          <p:cNvSpPr txBox="1"/>
+          <p:nvPr/>
+        </p:nvSpPr>
+        <p:spPr>
+          <a:xfrm>
+            <a:off x="548640" y="1234440"/>
+            <a:ext cx="11064240" cy="4937760"/>
+          </a:xfrm>
+          <a:prstGeom prst="rect">
+            <a:avLst/>
+          </a:prstGeom>
+          <a:noFill/>
+        </p:spPr>
+        <p:txBody>
+          <a:bodyPr wrap="square">
+            <a:noAutofit/>
+          </a:bodyPr>
+          <a:lstStyle/>
+          <a:p>
+            <a:pPr lvl="0" marL="457200" indent="-228600">
+              <a:buFont typeface="Calibri"/>
+              <a:spcAft>
+                <a:spcPts val="1000"/>
+              </a:spcAft>
+              <a:buSzPct val="100000"/>
+              <a:buChar char="•"/>
+              <a:lnSpc>
+                <a:spcPts val="2200"/>
+              </a:lnSpc>
+            </a:pPr>
+            <a:r>
+              <a:rPr sz="2000" b="0">
+                <a:solidFill>
+                  <a:srgbClr val="333333"/>
+                </a:solidFill>
+                <a:latin typeface="Calibri"/>
+              </a:rPr>
+              <a:t>Open macro-placement</a:t>
+            </a:r>
+          </a:p>
+          <a:p>
+            <a:pPr lvl="0" marL="457200" indent="-228600">
+              <a:buFont typeface="Calibri"/>
+              <a:spcAft>
+                <a:spcPts val="1000"/>
+              </a:spcAft>
+              <a:buSzPct val="100000"/>
+              <a:buChar char="•"/>
+              <a:lnSpc>
+                <a:spcPts val="2200"/>
+              </a:lnSpc>
+            </a:pPr>
+            <a:r>
+              <a:rPr sz="2000" b="0">
+                <a:solidFill>
+                  <a:srgbClr val="333333"/>
+                </a:solidFill>
+                <a:latin typeface="Calibri"/>
+              </a:rPr>
+              <a:t>Compare free golden D at zero comma two with Place macros: D at zero comma zero</a:t>
+            </a:r>
+          </a:p>
+          <a:p>
+            <a:pPr lvl="0" marL="457200" indent="-228600">
+              <a:buFont typeface="Calibri"/>
+              <a:spcAft>
+                <a:spcPts val="1000"/>
+              </a:spcAft>
+              <a:buSzPct val="100000"/>
+              <a:buChar char="•"/>
+              <a:lnSpc>
+                <a:spcPts val="2200"/>
+              </a:lnSpc>
+            </a:pPr>
+            <a:r>
+              <a:rPr sz="2000" b="0">
+                <a:solidFill>
+                  <a:srgbClr val="333333"/>
+                </a:solidFill>
+                <a:latin typeface="Calibri"/>
+              </a:rPr>
+              <a:t>Confirm legality and the macro flag</a:t>
+            </a:r>
+          </a:p>
+        </p:txBody>
+      </p:sp>
+      <p:sp>
+        <p:nvSpPr>
+          <p:cNvPr id="4" name="TextBox 3"/>
+          <p:cNvSpPr txBox="1"/>
+          <p:nvPr/>
+        </p:nvSpPr>
+        <p:spPr>
+          <a:xfrm>
+            <a:off x="548640" y="6355080"/>
+            <a:ext cx="11064240" cy="320040"/>
+          </a:xfrm>
+          <a:prstGeom prst="rect">
+            <a:avLst/>
+          </a:prstGeom>
+          <a:noFill/>
+        </p:spPr>
+        <p:txBody>
+          <a:bodyPr wrap="square">
+            <a:noAutofit/>
+          </a:bodyPr>
+          <a:lstStyle/>
+          <a:p>
+            <a:pPr algn="r">
+              <a:lnSpc>
+                <a:spcPts val="2200"/>
+              </a:lnSpc>
+              <a:defRPr sz="1000" b="0">
+                <a:solidFill>
+                  <a:srgbClr val="666666"/>
+                </a:solidFill>
+                <a:latin typeface="Calibri"/>
+              </a:defRPr>
+            </a:pPr>
+            <a:r>
+              <a:t>learn_floorplanning — 05 macro placement</a:t>
+            </a:r>
+          </a:p>
+        </p:txBody>
+      </p:sp>
+    </p:spTree>
+  </p:cSld>
+  <p:clrMapOvr>
+    <a:masterClrMapping/>
+  </p:clrMapOvr>
+</p:sld>
+</file>
+
+<file path=ppt/slides/slide11.xml><?xml version="1.0" encoding="utf-8"?>
+<p:sld xmlns:a="http://schemas.openxmlformats.org/drawingml/2006/main" xmlns:p="http://schemas.openxmlformats.org/presentationml/2006/main" xmlns:r="http://schemas.openxmlformats.org/officeDocument/2006/relationships">
+  <p:cSld>
+    <p:spTree>
+      <p:nvGrpSpPr>
+        <p:cNvPr id="1" name=""/>
+        <p:cNvGrpSpPr/>
+        <p:nvPr/>
+      </p:nvGrpSpPr>
+      <p:grpSpPr/>
+      <p:sp>
+        <p:nvSpPr>
+          <p:cNvPr id="2" name="TextBox 1"/>
+          <p:cNvSpPr txBox="1"/>
+          <p:nvPr/>
+        </p:nvSpPr>
+        <p:spPr>
+          <a:xfrm>
+            <a:off x="548640" y="411480"/>
+            <a:ext cx="11064240" cy="777240"/>
+          </a:xfrm>
+          <a:prstGeom prst="rect">
+            <a:avLst/>
+          </a:prstGeom>
+          <a:noFill/>
+        </p:spPr>
+        <p:txBody>
+          <a:bodyPr wrap="square">
+            <a:noAutofit/>
+          </a:bodyPr>
+          <a:lstStyle/>
+          <a:p>
+            <a:pPr>
+              <a:lnSpc>
+                <a:spcPts val="2200"/>
+              </a:lnSpc>
+            </a:pPr>
+            <a:r>
+              <a:rPr sz="2800" b="1">
+                <a:solidFill>
+                  <a:srgbClr val="1A1A2E"/>
+                </a:solidFill>
+                <a:latin typeface="Calibri"/>
+              </a:rPr>
+              <a:t>Implement track</a:t>
+            </a:r>
+          </a:p>
+        </p:txBody>
+      </p:sp>
+      <p:sp>
+        <p:nvSpPr>
+          <p:cNvPr id="3" name="TextBox 2"/>
+          <p:cNvSpPr txBox="1"/>
+          <p:nvPr/>
+        </p:nvSpPr>
+        <p:spPr>
+          <a:xfrm>
+            <a:off x="548640" y="1234440"/>
+            <a:ext cx="11064240" cy="4937760"/>
+          </a:xfrm>
+          <a:prstGeom prst="rect">
+            <a:avLst/>
+          </a:prstGeom>
+          <a:noFill/>
+        </p:spPr>
+        <p:txBody>
+          <a:bodyPr wrap="square">
+            <a:noAutofit/>
+          </a:bodyPr>
+          <a:lstStyle/>
+          <a:p>
+            <a:pPr lvl="0" marL="457200" indent="-228600">
+              <a:buFont typeface="Calibri"/>
+              <a:spcAft>
+                <a:spcPts val="1000"/>
+              </a:spcAft>
+              <a:buSzPct val="100000"/>
+              <a:buChar char="•"/>
+              <a:lnSpc>
+                <a:spcPts val="2200"/>
+              </a:lnSpc>
+            </a:pPr>
+            <a:r>
+              <a:rPr sz="2000" b="0">
+                <a:solidFill>
+                  <a:srgbClr val="333333"/>
+                </a:solidFill>
+                <a:latin typeface="Calibri"/>
+              </a:rPr>
+              <a:t>Fix D, pack the rest, assert D at (0,0), D.macro true, and is_legal_packing true</a:t>
+            </a:r>
+          </a:p>
+          <a:p>
+            <a:pPr lvl="0" marL="457200" indent="-228600">
+              <a:buFont typeface="Calibri"/>
+              <a:spcAft>
+                <a:spcPts val="1000"/>
+              </a:spcAft>
+              <a:buSzPct val="100000"/>
+              <a:buChar char="•"/>
+              <a:lnSpc>
+                <a:spcPts val="2200"/>
+              </a:lnSpc>
+            </a:pPr>
+            <a:r>
+              <a:rPr sz="2000" b="0">
+                <a:solidFill>
+                  <a:srgbClr val="333333"/>
+                </a:solidFill>
+                <a:latin typeface="Calibri"/>
+              </a:rPr>
+              <a:t>Note the free golden differs</a:t>
+            </a:r>
+          </a:p>
+        </p:txBody>
+      </p:sp>
+      <p:sp>
+        <p:nvSpPr>
+          <p:cNvPr id="4" name="TextBox 3"/>
+          <p:cNvSpPr txBox="1"/>
+          <p:nvPr/>
+        </p:nvSpPr>
+        <p:spPr>
+          <a:xfrm>
+            <a:off x="548640" y="6355080"/>
+            <a:ext cx="11064240" cy="320040"/>
+          </a:xfrm>
+          <a:prstGeom prst="rect">
+            <a:avLst/>
+          </a:prstGeom>
+          <a:noFill/>
+        </p:spPr>
+        <p:txBody>
+          <a:bodyPr wrap="square">
+            <a:noAutofit/>
+          </a:bodyPr>
+          <a:lstStyle/>
+          <a:p>
+            <a:pPr algn="r">
+              <a:lnSpc>
+                <a:spcPts val="2200"/>
+              </a:lnSpc>
+              <a:defRPr sz="1000" b="0">
+                <a:solidFill>
+                  <a:srgbClr val="666666"/>
+                </a:solidFill>
+                <a:latin typeface="Calibri"/>
+              </a:defRPr>
+            </a:pPr>
+            <a:r>
+              <a:t>learn_floorplanning — 05 macro placement</a:t>
+            </a:r>
+          </a:p>
+        </p:txBody>
+      </p:sp>
+    </p:spTree>
+  </p:cSld>
+  <p:clrMapOvr>
+    <a:masterClrMapping/>
+  </p:clrMapOvr>
+</p:sld>
+</file>
+
+<file path=ppt/slides/slide12.xml><?xml version="1.0" encoding="utf-8"?>
+<p:sld xmlns:a="http://schemas.openxmlformats.org/drawingml/2006/main" xmlns:p="http://schemas.openxmlformats.org/presentationml/2006/main" xmlns:r="http://schemas.openxmlformats.org/officeDocument/2006/relationships">
+  <p:cSld>
+    <p:spTree>
+      <p:nvGrpSpPr>
+        <p:cNvPr id="1" name=""/>
+        <p:cNvGrpSpPr/>
+        <p:nvPr/>
+      </p:nvGrpSpPr>
+      <p:grpSpPr/>
+      <p:sp>
+        <p:nvSpPr>
+          <p:cNvPr id="2" name="TextBox 1"/>
+          <p:cNvSpPr txBox="1"/>
+          <p:nvPr/>
+        </p:nvSpPr>
+        <p:spPr>
+          <a:xfrm>
+            <a:off x="548640" y="411480"/>
+            <a:ext cx="11064240" cy="777240"/>
+          </a:xfrm>
+          <a:prstGeom prst="rect">
+            <a:avLst/>
+          </a:prstGeom>
+          <a:noFill/>
+        </p:spPr>
+        <p:txBody>
+          <a:bodyPr wrap="square">
+            <a:noAutofit/>
+          </a:bodyPr>
+          <a:lstStyle/>
+          <a:p>
+            <a:pPr>
+              <a:lnSpc>
+                <a:spcPts val="2200"/>
+              </a:lnSpc>
+            </a:pPr>
+            <a:r>
+              <a:rPr sz="2800" b="1">
+                <a:solidFill>
+                  <a:srgbClr val="1A1A2E"/>
+                </a:solidFill>
+                <a:latin typeface="Calibri"/>
+              </a:rPr>
+              <a:t>Pitfalls</a:t>
+            </a:r>
+          </a:p>
+        </p:txBody>
+      </p:sp>
+      <p:sp>
+        <p:nvSpPr>
+          <p:cNvPr id="3" name="TextBox 2"/>
+          <p:cNvSpPr txBox="1"/>
+          <p:nvPr/>
+        </p:nvSpPr>
+        <p:spPr>
+          <a:xfrm>
+            <a:off x="548640" y="1234440"/>
+            <a:ext cx="11064240" cy="4937760"/>
+          </a:xfrm>
+          <a:prstGeom prst="rect">
+            <a:avLst/>
+          </a:prstGeom>
+          <a:noFill/>
+        </p:spPr>
+        <p:txBody>
+          <a:bodyPr wrap="square">
+            <a:noAutofit/>
+          </a:bodyPr>
+          <a:lstStyle/>
+          <a:p>
+            <a:pPr lvl="0" marL="457200" indent="-228600">
+              <a:buFont typeface="Calibri"/>
+              <a:spcAft>
+                <a:spcPts val="1000"/>
+              </a:spcAft>
+              <a:buSzPct val="100000"/>
+              <a:buChar char="•"/>
+              <a:lnSpc>
+                <a:spcPts val="2200"/>
+              </a:lnSpc>
+            </a:pPr>
+            <a:r>
+              <a:rPr sz="2000" b="0">
+                <a:solidFill>
+                  <a:srgbClr val="333333"/>
+                </a:solidFill>
+                <a:latin typeface="Calibri"/>
+              </a:rPr>
+              <a:t>Moving macros after fixing them</a:t>
+            </a:r>
+          </a:p>
+        </p:txBody>
+      </p:sp>
+      <p:sp>
+        <p:nvSpPr>
+          <p:cNvPr id="4" name="TextBox 3"/>
+          <p:cNvSpPr txBox="1"/>
+          <p:nvPr/>
+        </p:nvSpPr>
+        <p:spPr>
+          <a:xfrm>
+            <a:off x="548640" y="6355080"/>
+            <a:ext cx="11064240" cy="320040"/>
+          </a:xfrm>
+          <a:prstGeom prst="rect">
+            <a:avLst/>
+          </a:prstGeom>
+          <a:noFill/>
+        </p:spPr>
+        <p:txBody>
+          <a:bodyPr wrap="square">
+            <a:noAutofit/>
+          </a:bodyPr>
+          <a:lstStyle/>
+          <a:p>
+            <a:pPr algn="r">
+              <a:lnSpc>
+                <a:spcPts val="2200"/>
+              </a:lnSpc>
+              <a:defRPr sz="1000" b="0">
+                <a:solidFill>
+                  <a:srgbClr val="666666"/>
+                </a:solidFill>
+                <a:latin typeface="Calibri"/>
+              </a:defRPr>
+            </a:pPr>
+            <a:r>
+              <a:t>learn_floorplanning — 05 macro placement</a:t>
+            </a:r>
+          </a:p>
+        </p:txBody>
+      </p:sp>
+    </p:spTree>
+  </p:cSld>
+  <p:clrMapOvr>
+    <a:masterClrMapping/>
+  </p:clrMapOvr>
+</p:sld>
+</file>
+
+<file path=ppt/slides/slide13.xml><?xml version="1.0" encoding="utf-8"?>
+<p:sld xmlns:a="http://schemas.openxmlformats.org/drawingml/2006/main" xmlns:p="http://schemas.openxmlformats.org/presentationml/2006/main" xmlns:r="http://schemas.openxmlformats.org/officeDocument/2006/relationships">
+  <p:cSld>
+    <p:spTree>
+      <p:nvGrpSpPr>
+        <p:cNvPr id="1" name=""/>
+        <p:cNvGrpSpPr/>
+        <p:nvPr/>
+      </p:nvGrpSpPr>
+      <p:grpSpPr/>
+      <p:sp>
+        <p:nvSpPr>
+          <p:cNvPr id="2" name="TextBox 1"/>
+          <p:cNvSpPr txBox="1"/>
+          <p:nvPr/>
+        </p:nvSpPr>
+        <p:spPr>
+          <a:xfrm>
+            <a:off x="548640" y="411480"/>
+            <a:ext cx="11064240" cy="777240"/>
+          </a:xfrm>
+          <a:prstGeom prst="rect">
+            <a:avLst/>
+          </a:prstGeom>
+          <a:noFill/>
+        </p:spPr>
+        <p:txBody>
+          <a:bodyPr wrap="square">
+            <a:noAutofit/>
+          </a:bodyPr>
+          <a:lstStyle/>
+          <a:p>
+            <a:pPr>
+              <a:lnSpc>
+                <a:spcPts val="2200"/>
+              </a:lnSpc>
+            </a:pPr>
+            <a:r>
+              <a:rPr sz="2800" b="1">
+                <a:solidFill>
+                  <a:srgbClr val="1A1A2E"/>
+                </a:solidFill>
+                <a:latin typeface="Calibri"/>
+              </a:rPr>
               <a:t>Your turn</a:t>
             </a:r>
           </a:p>
@@ -4474,45 +5100,21 @@
                 </a:solidFill>
                 <a:latin typeface="Calibri"/>
               </a:rPr>
-              <a:t>Free golden has movable D</a:t>
-            </a:r>
-          </a:p>
-        </p:txBody>
-      </p:sp>
-      <p:pic>
-        <p:nvPicPr>
-          <p:cNvPr id="3" name="Picture 2" descr="01-free.png"/>
-          <p:cNvPicPr>
-            <a:picLocks noChangeAspect="1"/>
-          </p:cNvPicPr>
-          <p:nvPr/>
-        </p:nvPicPr>
-        <p:blipFill>
-          <a:blip r:embed="rId2"/>
-          <a:stretch>
-            <a:fillRect/>
-          </a:stretch>
-        </p:blipFill>
-        <p:spPr>
-          <a:xfrm>
-            <a:off x="548640" y="1143000"/>
-            <a:ext cx="9424736" cy="4572000"/>
-          </a:xfrm>
-          <a:prstGeom prst="rect">
-            <a:avLst/>
-          </a:prstGeom>
-        </p:spPr>
-      </p:pic>
-      <p:sp>
-        <p:nvSpPr>
-          <p:cNvPr id="4" name="TextBox 3"/>
+              <a:t>Pseudocode</a:t>
+            </a:r>
+          </a:p>
+        </p:txBody>
+      </p:sp>
+      <p:sp>
+        <p:nvSpPr>
+          <p:cNvPr id="3" name="TextBox 2"/>
           <p:cNvSpPr txBox="1"/>
           <p:nvPr/>
         </p:nvSpPr>
         <p:spPr>
           <a:xfrm>
-            <a:off x="548640" y="5897880"/>
-            <a:ext cx="11064240" cy="411480"/>
+            <a:off x="548640" y="1234440"/>
+            <a:ext cx="11064240" cy="4937760"/>
           </a:xfrm>
           <a:prstGeom prst="rect">
             <a:avLst/>
@@ -4525,26 +5127,98 @@
           </a:bodyPr>
           <a:lstStyle/>
           <a:p>
-            <a:pPr>
+            <a:pPr lvl="0" marL="457200" indent="-228600">
+              <a:buFont typeface="Calibri"/>
+              <a:spcAft>
+                <a:spcPts val="1000"/>
+              </a:spcAft>
+              <a:buSzPct val="100000"/>
+              <a:buChar char="•"/>
               <a:lnSpc>
                 <a:spcPts val="2200"/>
               </a:lnSpc>
             </a:pPr>
             <a:r>
-              <a:rPr sz="1200" b="0">
+              <a:rPr sz="2000" b="0">
                 <a:solidFill>
                   <a:srgbClr val="333333"/>
                 </a:solidFill>
                 <a:latin typeface="Calibri"/>
               </a:rPr>
-              <a:t>Free golden has movable D</a:t>
-            </a:r>
-          </a:p>
-        </p:txBody>
-      </p:sp>
-      <p:sp>
-        <p:nvSpPr>
-          <p:cNvPr id="5" name="TextBox 4"/>
+              <a:t>Macro placement locks hard blocks first</a:t>
+            </a:r>
+          </a:p>
+          <a:p>
+            <a:pPr lvl="0" marL="457200" indent="-228600">
+              <a:buFont typeface="Calibri"/>
+              <a:spcAft>
+                <a:spcPts val="1000"/>
+              </a:spcAft>
+              <a:buSzPct val="100000"/>
+              <a:buChar char="•"/>
+              <a:lnSpc>
+                <a:spcPts val="2200"/>
+              </a:lnSpc>
+            </a:pPr>
+            <a:r>
+              <a:rPr sz="2000" b="0">
+                <a:solidFill>
+                  <a:srgbClr val="333333"/>
+                </a:solidFill>
+                <a:latin typeface="Calibri"/>
+              </a:rPr>
+              <a:t>Free modules pack around those obstacles; legality fails if a macro drifts</a:t>
+            </a:r>
+          </a:p>
+          <a:p>
+            <a:pPr lvl="0" marL="457200" indent="-228600">
+              <a:buFont typeface="Calibri"/>
+              <a:spcAft>
+                <a:spcPts val="1000"/>
+              </a:spcAft>
+              <a:buSzPct val="100000"/>
+              <a:buChar char="•"/>
+              <a:lnSpc>
+                <a:spcPts val="2200"/>
+              </a:lnSpc>
+            </a:pPr>
+            <a:r>
+              <a:rPr sz="2000" b="0">
+                <a:solidFill>
+                  <a:srgbClr val="333333"/>
+                </a:solidFill>
+                <a:latin typeface="Calibri"/>
+              </a:rPr>
+              <a:t>Open this module's examples file and find the Pseudocode section</a:t>
+            </a:r>
+          </a:p>
+          <a:p>
+            <a:pPr lvl="0" marL="457200" indent="-228600">
+              <a:buFont typeface="Calibri"/>
+              <a:spcAft>
+                <a:spcPts val="1000"/>
+              </a:spcAft>
+              <a:buSzPct val="100000"/>
+              <a:buChar char="•"/>
+              <a:lnSpc>
+                <a:spcPts val="2200"/>
+              </a:lnSpc>
+            </a:pPr>
+            <a:r>
+              <a:rPr sz="2000" b="0">
+                <a:solidFill>
+                  <a:srgbClr val="333333"/>
+                </a:solidFill>
+                <a:latin typeface="Calibri"/>
+              </a:rPr>
+              <a:t>That written sketch is what you implement on the implement track and what the browser</a:t>
+            </a:r>
+          </a:p>
+        </p:txBody>
+      </p:sp>
+      <p:sp>
+        <p:nvSpPr>
+          <p:cNvPr id="4" name="TextBox 3"/>
           <p:cNvSpPr txBox="1"/>
           <p:nvPr/>
         </p:nvSpPr>
@@ -4633,45 +5307,21 @@
                 </a:solidFill>
                 <a:latin typeface="Calibri"/>
               </a:rPr>
-              <a:t>Fix macro D at (0,0)</a:t>
-            </a:r>
-          </a:p>
-        </p:txBody>
-      </p:sp>
-      <p:pic>
-        <p:nvPicPr>
-          <p:cNvPr id="3" name="Picture 2" descr="02-fix-d.png"/>
-          <p:cNvPicPr>
-            <a:picLocks noChangeAspect="1"/>
-          </p:cNvPicPr>
-          <p:nvPr/>
-        </p:nvPicPr>
-        <p:blipFill>
-          <a:blip r:embed="rId2"/>
-          <a:stretch>
-            <a:fillRect/>
-          </a:stretch>
-        </p:blipFill>
-        <p:spPr>
-          <a:xfrm>
-            <a:off x="548640" y="1143000"/>
-            <a:ext cx="9424736" cy="4572000"/>
-          </a:xfrm>
-          <a:prstGeom prst="rect">
-            <a:avLst/>
-          </a:prstGeom>
-        </p:spPr>
-      </p:pic>
-      <p:sp>
-        <p:nvSpPr>
-          <p:cNvPr id="4" name="TextBox 3"/>
+              <a:t>Algorithm sketch</a:t>
+            </a:r>
+          </a:p>
+        </p:txBody>
+      </p:sp>
+      <p:sp>
+        <p:nvSpPr>
+          <p:cNvPr id="3" name="TextBox 2"/>
           <p:cNvSpPr txBox="1"/>
           <p:nvPr/>
         </p:nvSpPr>
         <p:spPr>
           <a:xfrm>
-            <a:off x="548640" y="5897880"/>
-            <a:ext cx="11064240" cy="411480"/>
+            <a:off x="548640" y="1234440"/>
+            <a:ext cx="11064240" cy="4937760"/>
           </a:xfrm>
           <a:prstGeom prst="rect">
             <a:avLst/>
@@ -4684,26 +5334,54 @@
           </a:bodyPr>
           <a:lstStyle/>
           <a:p>
-            <a:pPr>
+            <a:pPr lvl="0" marL="457200" indent="-228600">
+              <a:buFont typeface="Calibri"/>
+              <a:spcAft>
+                <a:spcPts val="1000"/>
+              </a:spcAft>
+              <a:buSzPct val="100000"/>
+              <a:buChar char="•"/>
               <a:lnSpc>
                 <a:spcPts val="2200"/>
               </a:lnSpc>
             </a:pPr>
             <a:r>
-              <a:rPr sz="1200" b="0">
+              <a:rPr sz="2000" b="0">
                 <a:solidFill>
                   <a:srgbClr val="333333"/>
                 </a:solidFill>
                 <a:latin typeface="Calibri"/>
               </a:rPr>
-              <a:t>Fix macro D at (0,0)</a:t>
-            </a:r>
-          </a:p>
-        </p:txBody>
-      </p:sp>
-      <p:sp>
-        <p:nvSpPr>
-          <p:cNvPr id="5" name="TextBox 4"/>
+              <a:t>Free golden has movable D at zero comma two</a:t>
+            </a:r>
+          </a:p>
+          <a:p>
+            <a:pPr lvl="0" marL="457200" indent="-228600">
+              <a:buFont typeface="Calibri"/>
+              <a:spcAft>
+                <a:spcPts val="1000"/>
+              </a:spcAft>
+              <a:buSzPct val="100000"/>
+              <a:buChar char="•"/>
+              <a:lnSpc>
+                <a:spcPts val="2200"/>
+              </a:lnSpc>
+            </a:pPr>
+            <a:r>
+              <a:rPr sz="2000" b="0">
+                <a:solidFill>
+                  <a:srgbClr val="333333"/>
+                </a:solidFill>
+                <a:latin typeface="Calibri"/>
+              </a:rPr>
+              <a:t>Macro teaching pack pins D at zero comma zero with macro true and the rest legal</a:t>
+            </a:r>
+          </a:p>
+        </p:txBody>
+      </p:sp>
+      <p:sp>
+        <p:nvSpPr>
+          <p:cNvPr id="4" name="TextBox 3"/>
           <p:cNvSpPr txBox="1"/>
           <p:nvPr/>
         </p:nvSpPr>
@@ -4792,50 +5470,28 @@
                 </a:solidFill>
                 <a:latin typeface="Calibri"/>
               </a:rPr>
-              <a:t>Pack A–E around the macro</a:t>
-            </a:r>
-          </a:p>
-        </p:txBody>
-      </p:sp>
-      <p:pic>
-        <p:nvPicPr>
-          <p:cNvPr id="3" name="Picture 2" descr="03-pack-rest.png"/>
-          <p:cNvPicPr>
-            <a:picLocks noChangeAspect="1"/>
-          </p:cNvPicPr>
+              <a:t>Algorithm sketch — try these</a:t>
+            </a:r>
+          </a:p>
+        </p:txBody>
+      </p:sp>
+      <p:sp>
+        <p:nvSpPr>
+          <p:cNvPr id="3" name="TextBox 2"/>
+          <p:cNvSpPr txBox="1"/>
           <p:nvPr/>
-        </p:nvPicPr>
-        <p:blipFill>
-          <a:blip r:embed="rId2"/>
-          <a:stretch>
-            <a:fillRect/>
-          </a:stretch>
-        </p:blipFill>
+        </p:nvSpPr>
         <p:spPr>
           <a:xfrm>
             <a:off x="548640" y="1143000"/>
-            <a:ext cx="9424736" cy="4572000"/>
+            <a:ext cx="11064240" cy="5029200"/>
           </a:xfrm>
           <a:prstGeom prst="rect">
             <a:avLst/>
           </a:prstGeom>
-        </p:spPr>
-      </p:pic>
-      <p:sp>
-        <p:nvSpPr>
-          <p:cNvPr id="4" name="TextBox 3"/>
-          <p:cNvSpPr txBox="1"/>
-          <p:nvPr/>
-        </p:nvSpPr>
-        <p:spPr>
-          <a:xfrm>
-            <a:off x="548640" y="5897880"/>
-            <a:ext cx="11064240" cy="411480"/>
-          </a:xfrm>
-          <a:prstGeom prst="rect">
-            <a:avLst/>
-          </a:prstGeom>
-          <a:noFill/>
+          <a:solidFill>
+            <a:srgbClr val="F4F4F4"/>
+          </a:solidFill>
         </p:spPr>
         <p:txBody>
           <a:bodyPr wrap="square">
@@ -4847,22 +5503,120 @@
               <a:lnSpc>
                 <a:spcPts val="2200"/>
               </a:lnSpc>
+              <a:spcAft>
+                <a:spcPts val="400"/>
+              </a:spcAft>
             </a:pPr>
             <a:r>
-              <a:rPr sz="1200" b="0">
+              <a:rPr sz="2000" b="0">
                 <a:solidFill>
                   <a:srgbClr val="333333"/>
                 </a:solidFill>
-                <a:latin typeface="Calibri"/>
+                <a:latin typeface="Consolas"/>
               </a:rPr>
-              <a:t>Pack A–E around the macro</a:t>
-            </a:r>
-          </a:p>
-        </p:txBody>
-      </p:sp>
-      <p:sp>
-        <p:nvSpPr>
-          <p:cNvPr id="5" name="TextBox 4"/>
+              <a:t>INPUT: macros F locked (x,y), free modules</a:t>
+            </a:r>
+          </a:p>
+          <a:p>
+            <a:pPr>
+              <a:lnSpc>
+                <a:spcPts val="2200"/>
+              </a:lnSpc>
+              <a:spcAft>
+                <a:spcPts val="400"/>
+              </a:spcAft>
+            </a:pPr>
+            <a:r>
+              <a:rPr sz="2000" b="0">
+                <a:solidFill>
+                  <a:srgbClr val="333333"/>
+                </a:solidFill>
+                <a:latin typeface="Consolas"/>
+              </a:rPr>
+              <a:t>OUTPUT: legal pack; macros never move</a:t>
+            </a:r>
+          </a:p>
+          <a:p>
+            <a:pPr>
+              <a:lnSpc>
+                <a:spcPts val="2200"/>
+              </a:lnSpc>
+              <a:spcAft>
+                <a:spcPts val="400"/>
+              </a:spcAft>
+            </a:pPr>
+            <a:r>
+              <a:rPr sz="2000" b="0">
+                <a:solidFill>
+                  <a:srgbClr val="333333"/>
+                </a:solidFill>
+                <a:latin typeface="Consolas"/>
+              </a:rPr>
+              <a:t>place each f∈F at locked pose (macro flag)</a:t>
+            </a:r>
+          </a:p>
+          <a:p>
+            <a:pPr>
+              <a:lnSpc>
+                <a:spcPts val="2200"/>
+              </a:lnSpc>
+              <a:spcAft>
+                <a:spcPts val="400"/>
+              </a:spcAft>
+            </a:pPr>
+            <a:r>
+              <a:rPr sz="2000" b="0">
+                <a:solidFill>
+                  <a:srgbClr val="333333"/>
+                </a:solidFill>
+                <a:latin typeface="Consolas"/>
+              </a:rPr>
+              <a:t>pack free modules around F obstacles</a:t>
+            </a:r>
+          </a:p>
+          <a:p>
+            <a:pPr>
+              <a:lnSpc>
+                <a:spcPts val="2200"/>
+              </a:lnSpc>
+              <a:spcAft>
+                <a:spcPts val="400"/>
+              </a:spcAft>
+            </a:pPr>
+            <a:r>
+              <a:rPr sz="2000" b="0">
+                <a:solidFill>
+                  <a:srgbClr val="333333"/>
+                </a:solidFill>
+                <a:latin typeface="Consolas"/>
+              </a:rPr>
+              <a:t>fail if any macro drifts</a:t>
+            </a:r>
+          </a:p>
+          <a:p>
+            <a:pPr>
+              <a:lnSpc>
+                <a:spcPts val="2200"/>
+              </a:lnSpc>
+              <a:spcAft>
+                <a:spcPts val="400"/>
+              </a:spcAft>
+            </a:pPr>
+            <a:r>
+              <a:rPr sz="2000" b="0">
+                <a:solidFill>
+                  <a:srgbClr val="333333"/>
+                </a:solidFill>
+                <a:latin typeface="Consolas"/>
+              </a:rPr>
+              <a:t>GOLDEN free: D@(0,2); macro: D@(0,0)</a:t>
+            </a:r>
+          </a:p>
+        </p:txBody>
+      </p:sp>
+      <p:sp>
+        <p:nvSpPr>
+          <p:cNvPr id="4" name="TextBox 3"/>
           <p:cNvSpPr txBox="1"/>
           <p:nvPr/>
         </p:nvSpPr>
@@ -4951,14 +5705,14 @@
                 </a:solidFill>
                 <a:latin typeface="Calibri"/>
               </a:rPr>
-              <a:t>Macro packing is legal</a:t>
+              <a:t>Free golden has movable D</a:t>
             </a:r>
           </a:p>
         </p:txBody>
       </p:sp>
       <p:pic>
         <p:nvPicPr>
-          <p:cNvPr id="3" name="Picture 2" descr="04-legal.png"/>
+          <p:cNvPr id="3" name="Picture 2" descr="01-free.png"/>
           <p:cNvPicPr>
             <a:picLocks noChangeAspect="1"/>
           </p:cNvPicPr>
@@ -5014,7 +5768,7 @@
                 </a:solidFill>
                 <a:latin typeface="Calibri"/>
               </a:rPr>
-              <a:t>Macro packing is legal</a:t>
+              <a:t>Free golden has movable D</a:t>
             </a:r>
           </a:p>
         </p:txBody>
@@ -5110,14 +5864,14 @@
                 </a:solidFill>
                 <a:latin typeface="Calibri"/>
               </a:rPr>
-              <a:t>Macros first, then cells</a:t>
+              <a:t>Fix macro D at (0,0)</a:t>
             </a:r>
           </a:p>
         </p:txBody>
       </p:sp>
       <p:pic>
         <p:nvPicPr>
-          <p:cNvPr id="3" name="Picture 2" descr="05-takeaway.png"/>
+          <p:cNvPr id="3" name="Picture 2" descr="02-fix-d.png"/>
           <p:cNvPicPr>
             <a:picLocks noChangeAspect="1"/>
           </p:cNvPicPr>
@@ -5173,7 +5927,7 @@
                 </a:solidFill>
                 <a:latin typeface="Calibri"/>
               </a:rPr>
-              <a:t>Macros first, then cells</a:t>
+              <a:t>Fix macro D at (0,0)</a:t>
             </a:r>
           </a:p>
         </p:txBody>
@@ -5269,21 +6023,45 @@
                 </a:solidFill>
                 <a:latin typeface="Calibri"/>
               </a:rPr>
-              <a:t>Browser lab track</a:t>
-            </a:r>
-          </a:p>
-        </p:txBody>
-      </p:sp>
-      <p:sp>
-        <p:nvSpPr>
-          <p:cNvPr id="3" name="TextBox 2"/>
+              <a:t>Pack A–E around the macro</a:t>
+            </a:r>
+          </a:p>
+        </p:txBody>
+      </p:sp>
+      <p:pic>
+        <p:nvPicPr>
+          <p:cNvPr id="3" name="Picture 2" descr="03-pack-rest.png"/>
+          <p:cNvPicPr>
+            <a:picLocks noChangeAspect="1"/>
+          </p:cNvPicPr>
+          <p:nvPr/>
+        </p:nvPicPr>
+        <p:blipFill>
+          <a:blip r:embed="rId2"/>
+          <a:stretch>
+            <a:fillRect/>
+          </a:stretch>
+        </p:blipFill>
+        <p:spPr>
+          <a:xfrm>
+            <a:off x="548640" y="1143000"/>
+            <a:ext cx="9424736" cy="4572000"/>
+          </a:xfrm>
+          <a:prstGeom prst="rect">
+            <a:avLst/>
+          </a:prstGeom>
+        </p:spPr>
+      </p:pic>
+      <p:sp>
+        <p:nvSpPr>
+          <p:cNvPr id="4" name="TextBox 3"/>
           <p:cNvSpPr txBox="1"/>
           <p:nvPr/>
         </p:nvSpPr>
         <p:spPr>
           <a:xfrm>
-            <a:off x="548640" y="1234440"/>
-            <a:ext cx="11064240" cy="4937760"/>
+            <a:off x="548640" y="5897880"/>
+            <a:ext cx="11064240" cy="411480"/>
           </a:xfrm>
           <a:prstGeom prst="rect">
             <a:avLst/>
@@ -5296,76 +6074,26 @@
           </a:bodyPr>
           <a:lstStyle/>
           <a:p>
-            <a:pPr lvl="0" marL="457200" indent="-228600">
-              <a:buFont typeface="Calibri"/>
-              <a:spcAft>
-                <a:spcPts val="1000"/>
-              </a:spcAft>
-              <a:buSzPct val="100000"/>
-              <a:buChar char="•"/>
+            <a:pPr>
               <a:lnSpc>
                 <a:spcPts val="2200"/>
               </a:lnSpc>
             </a:pPr>
             <a:r>
-              <a:rPr sz="2000" b="0">
+              <a:rPr sz="1200" b="0">
                 <a:solidFill>
                   <a:srgbClr val="333333"/>
                 </a:solidFill>
                 <a:latin typeface="Calibri"/>
               </a:rPr>
-              <a:t>Open macro-placement</a:t>
-            </a:r>
-          </a:p>
-          <a:p>
-            <a:pPr lvl="0" marL="457200" indent="-228600">
-              <a:buFont typeface="Calibri"/>
-              <a:spcAft>
-                <a:spcPts val="1000"/>
-              </a:spcAft>
-              <a:buSzPct val="100000"/>
-              <a:buChar char="•"/>
-              <a:lnSpc>
-                <a:spcPts val="2200"/>
-              </a:lnSpc>
-            </a:pPr>
-            <a:r>
-              <a:rPr sz="2000" b="0">
-                <a:solidFill>
-                  <a:srgbClr val="333333"/>
-                </a:solidFill>
-                <a:latin typeface="Calibri"/>
-              </a:rPr>
-              <a:t>Compare free golden D at zero comma two with Place macros: D at zero comma zero</a:t>
-            </a:r>
-          </a:p>
-          <a:p>
-            <a:pPr lvl="0" marL="457200" indent="-228600">
-              <a:buFont typeface="Calibri"/>
-              <a:spcAft>
-                <a:spcPts val="1000"/>
-              </a:spcAft>
-              <a:buSzPct val="100000"/>
-              <a:buChar char="•"/>
-              <a:lnSpc>
-                <a:spcPts val="2200"/>
-              </a:lnSpc>
-            </a:pPr>
-            <a:r>
-              <a:rPr sz="2000" b="0">
-                <a:solidFill>
-                  <a:srgbClr val="333333"/>
-                </a:solidFill>
-                <a:latin typeface="Calibri"/>
-              </a:rPr>
-              <a:t>Confirm legality and the macro flag</a:t>
-            </a:r>
-          </a:p>
-        </p:txBody>
-      </p:sp>
-      <p:sp>
-        <p:nvSpPr>
-          <p:cNvPr id="4" name="TextBox 3"/>
+              <a:t>Pack A–E around the macro</a:t>
+            </a:r>
+          </a:p>
+        </p:txBody>
+      </p:sp>
+      <p:sp>
+        <p:nvSpPr>
+          <p:cNvPr id="5" name="TextBox 4"/>
           <p:cNvSpPr txBox="1"/>
           <p:nvPr/>
         </p:nvSpPr>
@@ -5454,21 +6182,45 @@
                 </a:solidFill>
                 <a:latin typeface="Calibri"/>
               </a:rPr>
-              <a:t>Implement track</a:t>
-            </a:r>
-          </a:p>
-        </p:txBody>
-      </p:sp>
-      <p:sp>
-        <p:nvSpPr>
-          <p:cNvPr id="3" name="TextBox 2"/>
+              <a:t>Macro packing is legal</a:t>
+            </a:r>
+          </a:p>
+        </p:txBody>
+      </p:sp>
+      <p:pic>
+        <p:nvPicPr>
+          <p:cNvPr id="3" name="Picture 2" descr="04-legal.png"/>
+          <p:cNvPicPr>
+            <a:picLocks noChangeAspect="1"/>
+          </p:cNvPicPr>
+          <p:nvPr/>
+        </p:nvPicPr>
+        <p:blipFill>
+          <a:blip r:embed="rId2"/>
+          <a:stretch>
+            <a:fillRect/>
+          </a:stretch>
+        </p:blipFill>
+        <p:spPr>
+          <a:xfrm>
+            <a:off x="548640" y="1143000"/>
+            <a:ext cx="9424736" cy="4572000"/>
+          </a:xfrm>
+          <a:prstGeom prst="rect">
+            <a:avLst/>
+          </a:prstGeom>
+        </p:spPr>
+      </p:pic>
+      <p:sp>
+        <p:nvSpPr>
+          <p:cNvPr id="4" name="TextBox 3"/>
           <p:cNvSpPr txBox="1"/>
           <p:nvPr/>
         </p:nvSpPr>
         <p:spPr>
           <a:xfrm>
-            <a:off x="548640" y="1234440"/>
-            <a:ext cx="11064240" cy="4937760"/>
+            <a:off x="548640" y="5897880"/>
+            <a:ext cx="11064240" cy="411480"/>
           </a:xfrm>
           <a:prstGeom prst="rect">
             <a:avLst/>
@@ -5481,54 +6233,26 @@
           </a:bodyPr>
           <a:lstStyle/>
           <a:p>
-            <a:pPr lvl="0" marL="457200" indent="-228600">
-              <a:buFont typeface="Calibri"/>
-              <a:spcAft>
-                <a:spcPts val="1000"/>
-              </a:spcAft>
-              <a:buSzPct val="100000"/>
-              <a:buChar char="•"/>
+            <a:pPr>
               <a:lnSpc>
                 <a:spcPts val="2200"/>
               </a:lnSpc>
             </a:pPr>
             <a:r>
-              <a:rPr sz="2000" b="0">
+              <a:rPr sz="1200" b="0">
                 <a:solidFill>
                   <a:srgbClr val="333333"/>
                 </a:solidFill>
                 <a:latin typeface="Calibri"/>
               </a:rPr>
-              <a:t>Fix D, pack the rest, assert D at (0,0), D.macro true, and is_legal_packing true</a:t>
-            </a:r>
-          </a:p>
-          <a:p>
-            <a:pPr lvl="0" marL="457200" indent="-228600">
-              <a:buFont typeface="Calibri"/>
-              <a:spcAft>
-                <a:spcPts val="1000"/>
-              </a:spcAft>
-              <a:buSzPct val="100000"/>
-              <a:buChar char="•"/>
-              <a:lnSpc>
-                <a:spcPts val="2200"/>
-              </a:lnSpc>
-            </a:pPr>
-            <a:r>
-              <a:rPr sz="2000" b="0">
-                <a:solidFill>
-                  <a:srgbClr val="333333"/>
-                </a:solidFill>
-                <a:latin typeface="Calibri"/>
-              </a:rPr>
-              <a:t>Note the free golden differs</a:t>
-            </a:r>
-          </a:p>
-        </p:txBody>
-      </p:sp>
-      <p:sp>
-        <p:nvSpPr>
-          <p:cNvPr id="4" name="TextBox 3"/>
+              <a:t>Macro packing is legal</a:t>
+            </a:r>
+          </a:p>
+        </p:txBody>
+      </p:sp>
+      <p:sp>
+        <p:nvSpPr>
+          <p:cNvPr id="5" name="TextBox 4"/>
           <p:cNvSpPr txBox="1"/>
           <p:nvPr/>
         </p:nvSpPr>
@@ -5617,21 +6341,45 @@
                 </a:solidFill>
                 <a:latin typeface="Calibri"/>
               </a:rPr>
-              <a:t>Pitfalls</a:t>
-            </a:r>
-          </a:p>
-        </p:txBody>
-      </p:sp>
-      <p:sp>
-        <p:nvSpPr>
-          <p:cNvPr id="3" name="TextBox 2"/>
+              <a:t>Macros first, then cells</a:t>
+            </a:r>
+          </a:p>
+        </p:txBody>
+      </p:sp>
+      <p:pic>
+        <p:nvPicPr>
+          <p:cNvPr id="3" name="Picture 2" descr="05-takeaway.png"/>
+          <p:cNvPicPr>
+            <a:picLocks noChangeAspect="1"/>
+          </p:cNvPicPr>
+          <p:nvPr/>
+        </p:nvPicPr>
+        <p:blipFill>
+          <a:blip r:embed="rId2"/>
+          <a:stretch>
+            <a:fillRect/>
+          </a:stretch>
+        </p:blipFill>
+        <p:spPr>
+          <a:xfrm>
+            <a:off x="548640" y="1143000"/>
+            <a:ext cx="9424736" cy="4572000"/>
+          </a:xfrm>
+          <a:prstGeom prst="rect">
+            <a:avLst/>
+          </a:prstGeom>
+        </p:spPr>
+      </p:pic>
+      <p:sp>
+        <p:nvSpPr>
+          <p:cNvPr id="4" name="TextBox 3"/>
           <p:cNvSpPr txBox="1"/>
           <p:nvPr/>
         </p:nvSpPr>
         <p:spPr>
           <a:xfrm>
-            <a:off x="548640" y="1234440"/>
-            <a:ext cx="11064240" cy="4937760"/>
+            <a:off x="548640" y="5897880"/>
+            <a:ext cx="11064240" cy="411480"/>
           </a:xfrm>
           <a:prstGeom prst="rect">
             <a:avLst/>
@@ -5644,32 +6392,26 @@
           </a:bodyPr>
           <a:lstStyle/>
           <a:p>
-            <a:pPr lvl="0" marL="457200" indent="-228600">
-              <a:buFont typeface="Calibri"/>
-              <a:spcAft>
-                <a:spcPts val="1000"/>
-              </a:spcAft>
-              <a:buSzPct val="100000"/>
-              <a:buChar char="•"/>
+            <a:pPr>
               <a:lnSpc>
                 <a:spcPts val="2200"/>
               </a:lnSpc>
             </a:pPr>
             <a:r>
-              <a:rPr sz="2000" b="0">
+              <a:rPr sz="1200" b="0">
                 <a:solidFill>
                   <a:srgbClr val="333333"/>
                 </a:solidFill>
                 <a:latin typeface="Calibri"/>
               </a:rPr>
-              <a:t>Moving macros after fixing them</a:t>
-            </a:r>
-          </a:p>
-        </p:txBody>
-      </p:sp>
-      <p:sp>
-        <p:nvSpPr>
-          <p:cNvPr id="4" name="TextBox 3"/>
+              <a:t>Macros first, then cells</a:t>
+            </a:r>
+          </a:p>
+        </p:txBody>
+      </p:sp>
+      <p:sp>
+        <p:nvSpPr>
+          <p:cNvPr id="5" name="TextBox 4"/>
           <p:cNvSpPr txBox="1"/>
           <p:nvPr/>
         </p:nvSpPr>
